--- a/outputs/produkte/mama-ceo/03-praesentationen/saeule-2/01-lektion-2-1.pptx
+++ b/outputs/produkte/mama-ceo/03-praesentationen/saeule-2/01-lektion-2-1.pptx
@@ -4,6 +4,9 @@
   <p:sldMasterIdLst>
     <p:sldMasterId id="2147483648" r:id="rId1"/>
   </p:sldMasterIdLst>
+  <p:notesMasterIdLst>
+    <p:notesMasterId r:id="rId11"/>
+  </p:notesMasterIdLst>
   <p:sldIdLst>
     <p:sldId id="256" r:id="rId2"/>
     <p:sldId id="257" r:id="rId3"/>
@@ -15,10 +18,7 @@
     <p:sldId id="263" r:id="rId9"/>
     <p:sldId id="264" r:id="rId10"/>
   </p:sldIdLst>
-  <p:notesMasterIdLst>
-    <p:notesMasterId r:id="rId11"/>
-  </p:notesMasterIdLst>
-  <p:sldSz cx="9144000" cy="5143500"/>
+  <p:sldSz cx="9144000" cy="5143500" type="screen16x9"/>
   <p:notesSz cx="5143500" cy="9144000"/>
   <p:defaultTextStyle>
     <a:lvl1pPr marL="0" algn="l" defTabSz="914400" rtl="0" eaLnBrk="1" latinLnBrk="0" hangingPunct="1">
@@ -112,6 +112,11 @@
       </a:defRPr>
     </a:lvl9pPr>
   </p:defaultTextStyle>
+  <p:extLst>
+    <p:ext uri="{EFAFB233-063F-42B5-8137-9DF3F51BA10A}">
+      <p15:sldGuideLst xmlns:p15="http://schemas.microsoft.com/office/powerpoint/2012/main"/>
+    </p:ext>
+  </p:extLst>
 </p:presentation>
 </file>
 
@@ -137,234 +142,10 @@
           <a:chExt cx="0" cy="0"/>
         </a:xfrm>
       </p:grpSpPr>
-      <p:sp>
-        <p:nvSpPr>
-          <p:cNvPr id="2" name="Header Placeholder 1"/>
-          <p:cNvSpPr>
-            <a:spLocks noGrp="1"/>
-          </p:cNvSpPr>
-          <p:nvPr>
-            <p:ph type="hdr" sz="quarter"/>
-          </p:nvPr>
-        </p:nvSpPr>
-        <p:spPr>
-          <a:xfrm>
-            <a:off x="0" y="0"/>
-            <a:ext cx="2971800" cy="458788"/>
-          </a:xfrm>
-          <a:prstGeom prst="rect">
-            <a:avLst/>
-          </a:prstGeom>
-        </p:spPr>
-        <p:txBody>
-          <a:bodyPr vert="horz" lIns="91440" tIns="45720" rIns="91440" bIns="45720" rtlCol="0"/>
-          <a:lstStyle>
-            <a:lvl1pPr algn="l">
-              <a:defRPr sz="1200"/>
-            </a:lvl1pPr>
-          </a:lstStyle>
-          <a:p>
-            <a:endParaRPr lang="en-US"/>
-          </a:p>
-        </p:txBody>
-      </p:sp>
-      <p:sp>
-        <p:nvSpPr>
-          <p:cNvPr id="3" name="Date Placeholder 2"/>
-          <p:cNvSpPr>
-            <a:spLocks noGrp="1"/>
-          </p:cNvSpPr>
-          <p:nvPr>
-            <p:ph type="dt" idx="1"/>
-          </p:nvPr>
-        </p:nvSpPr>
-        <p:spPr>
-          <a:xfrm>
-            <a:off x="3884613" y="0"/>
-            <a:ext cx="2971800" cy="458788"/>
-          </a:xfrm>
-          <a:prstGeom prst="rect">
-            <a:avLst/>
-          </a:prstGeom>
-        </p:spPr>
-        <p:txBody>
-          <a:bodyPr vert="horz" lIns="91440" tIns="45720" rIns="91440" bIns="45720" rtlCol="0"/>
-          <a:lstStyle>
-            <a:lvl1pPr algn="r">
-              <a:defRPr sz="1200"/>
-            </a:lvl1pPr>
-          </a:lstStyle>
-          <a:p>
-            <a:fld id="{5282F153-3F37-0F45-9E97-73ACFA13230C}" type="datetimeFigureOut">
-              <a:rPr lang="en-US"/>
-              <a:t>7/23/19</a:t>
-            </a:fld>
-            <a:endParaRPr lang="en-US"/>
-          </a:p>
-        </p:txBody>
-      </p:sp>
-      <p:sp>
-        <p:nvSpPr>
-          <p:cNvPr id="4" name="Slide Image Placeholder 3"/>
-          <p:cNvSpPr>
-            <a:spLocks noGrp="1" noRot="1" noChangeAspect="1"/>
-          </p:cNvSpPr>
-          <p:nvPr>
-            <p:ph type="sldImg" idx="2"/>
-          </p:nvPr>
-        </p:nvSpPr>
-        <p:spPr>
-          <a:xfrm>
-            <a:off x="685800" y="1143000"/>
-            <a:ext cx="5486400" cy="3086100"/>
-          </a:xfrm>
-          <a:prstGeom prst="rect">
-            <a:avLst/>
-          </a:prstGeom>
-          <a:noFill/>
-          <a:ln w="12700">
-            <a:solidFill>
-              <a:prstClr val="black"/>
-            </a:solidFill>
-          </a:ln>
-        </p:spPr>
-        <p:txBody>
-          <a:bodyPr vert="horz" lIns="91440" tIns="45720" rIns="91440" bIns="45720" rtlCol="0" anchor="ctr"/>
-          <a:lstStyle/>
-          <a:p>
-            <a:endParaRPr lang="en-US"/>
-          </a:p>
-        </p:txBody>
-      </p:sp>
-      <p:sp>
-        <p:nvSpPr>
-          <p:cNvPr id="5" name="Notes Placeholder 4"/>
-          <p:cNvSpPr>
-            <a:spLocks noGrp="1"/>
-          </p:cNvSpPr>
-          <p:nvPr>
-            <p:ph type="body" sz="quarter" idx="3"/>
-          </p:nvPr>
-        </p:nvSpPr>
-        <p:spPr>
-          <a:xfrm>
-            <a:off x="685800" y="4400550"/>
-            <a:ext cx="5486400" cy="3600450"/>
-          </a:xfrm>
-          <a:prstGeom prst="rect">
-            <a:avLst/>
-          </a:prstGeom>
-        </p:spPr>
-        <p:txBody>
-          <a:bodyPr vert="horz" lIns="91440" tIns="45720" rIns="91440" bIns="45720" rtlCol="0"/>
-          <a:lstStyle/>
-          <a:p>
-            <a:pPr lvl="0"/>
-            <a:r>
-              <a:rPr lang="en-US"/>
-              <a:t>Click to edit Master text styles</a:t>
-            </a:r>
-          </a:p>
-          <a:p>
-            <a:pPr lvl="1"/>
-            <a:r>
-              <a:rPr lang="en-US"/>
-              <a:t>Second level</a:t>
-            </a:r>
-          </a:p>
-          <a:p>
-            <a:pPr lvl="2"/>
-            <a:r>
-              <a:rPr lang="en-US"/>
-              <a:t>Third level</a:t>
-            </a:r>
-          </a:p>
-          <a:p>
-            <a:pPr lvl="3"/>
-            <a:r>
-              <a:rPr lang="en-US"/>
-              <a:t>Fourth level</a:t>
-            </a:r>
-          </a:p>
-          <a:p>
-            <a:pPr lvl="4"/>
-            <a:r>
-              <a:rPr lang="en-US"/>
-              <a:t>Fifth level</a:t>
-            </a:r>
-          </a:p>
-        </p:txBody>
-      </p:sp>
-      <p:sp>
-        <p:nvSpPr>
-          <p:cNvPr id="6" name="Footer Placeholder 5"/>
-          <p:cNvSpPr>
-            <a:spLocks noGrp="1"/>
-          </p:cNvSpPr>
-          <p:nvPr>
-            <p:ph type="ftr" sz="quarter" idx="4"/>
-          </p:nvPr>
-        </p:nvSpPr>
-        <p:spPr>
-          <a:xfrm>
-            <a:off x="0" y="8685213"/>
-            <a:ext cx="2971800" cy="458787"/>
-          </a:xfrm>
-          <a:prstGeom prst="rect">
-            <a:avLst/>
-          </a:prstGeom>
-        </p:spPr>
-        <p:txBody>
-          <a:bodyPr vert="horz" lIns="91440" tIns="45720" rIns="91440" bIns="45720" rtlCol="0" anchor="b"/>
-          <a:lstStyle>
-            <a:lvl1pPr algn="l">
-              <a:defRPr sz="1200"/>
-            </a:lvl1pPr>
-          </a:lstStyle>
-          <a:p>
-            <a:endParaRPr lang="en-US"/>
-          </a:p>
-        </p:txBody>
-      </p:sp>
-      <p:sp>
-        <p:nvSpPr>
-          <p:cNvPr id="7" name="Slide Number Placeholder 6"/>
-          <p:cNvSpPr>
-            <a:spLocks noGrp="1"/>
-          </p:cNvSpPr>
-          <p:nvPr>
-            <p:ph type="sldNum" sz="quarter" idx="5"/>
-          </p:nvPr>
-        </p:nvSpPr>
-        <p:spPr>
-          <a:xfrm>
-            <a:off x="3884613" y="8685213"/>
-            <a:ext cx="2971800" cy="458787"/>
-          </a:xfrm>
-          <a:prstGeom prst="rect">
-            <a:avLst/>
-          </a:prstGeom>
-        </p:spPr>
-        <p:txBody>
-          <a:bodyPr vert="horz" lIns="91440" tIns="45720" rIns="91440" bIns="45720" rtlCol="0" anchor="b"/>
-          <a:lstStyle>
-            <a:lvl1pPr algn="r">
-              <a:defRPr sz="1200"/>
-            </a:lvl1pPr>
-          </a:lstStyle>
-          <a:p>
-            <a:fld id="{CE5E9CC1-C706-0F49-92D6-E571CC5EEA8F}" type="slidenum">
-              <a:rPr lang="en-US"/>
-              <a:t>‹#›</a:t>
-            </a:fld>
-            <a:endParaRPr lang="en-US"/>
-          </a:p>
-        </p:txBody>
-      </p:sp>
     </p:spTree>
     <p:extLst>
       <p:ext uri="{BB962C8B-B14F-4D97-AF65-F5344CB8AC3E}">
-        <p14:creationId xmlns:p14="http://schemas.microsoft.com/office/powerpoint/2010/main" val="1024086991"/>
+        <p14:creationId xmlns:p14="http://schemas.microsoft.com/office/powerpoint/2010/main" val="3068497883"/>
       </p:ext>
     </p:extLst>
   </p:cSld>
@@ -513,7 +294,6 @@
               <a:t>Intro:
 „Wir starten Säule 2 mit einer ehrlichen Diagnose. Nicht damit du dich schlecht fühlst — damit du verstehst was passiert. Du bist nicht faul. Du hast ein System-Problem."</a:t>
             </a:r>
-            <a:endParaRPr lang="en-US" dirty="0"/>
           </a:p>
         </p:txBody>
       </p:sp>
@@ -602,7 +382,6 @@
               <a:t>Sprechnotiz:
 „Vier Symptome. Wenn du dich in drei davon wiedererkennst, bist du im Hamsterrad. Das ist keine Schande — das ist die Realität von 80% der Mamas im Network."</a:t>
             </a:r>
-            <a:endParaRPr lang="en-US" dirty="0"/>
           </a:p>
         </p:txBody>
       </p:sp>
@@ -691,7 +470,6 @@
               <a:t>Sprechnotiz:
 „Symptom eins: du arbeitest noch 60 bis 80 % in deinem alten Job. Das frisst deine Energie für das Business auf. Aber du kannst nicht kündigen — die Kinderbetreuung kostet mehr als dein Lohn. Klassische Falle."</a:t>
             </a:r>
-            <a:endParaRPr lang="en-US" dirty="0"/>
           </a:p>
         </p:txBody>
       </p:sp>
@@ -780,7 +558,6 @@
               <a:t>Sprechnotiz:
 „Symptom zwei: dein Partner sieht dein Business nicht als ernsthaftes Business. Es ist das ‚Instagram-Ding'. Das macht es noch schwerer Ressourcen zu fordern — Babysitter, Zeit, Verständnis."</a:t>
             </a:r>
-            <a:endParaRPr lang="en-US" dirty="0"/>
           </a:p>
         </p:txBody>
       </p:sp>
@@ -869,7 +646,6 @@
               <a:t>Sprechnotiz:
 „Symptom drei: du machst alles selbst. Posten, antworten, Strategie, Reels, Buchhaltung. Bis 22 Uhr. Und am Ende fragst du dich was du heute eigentlich ‚erreicht' hast — und kannst keine drei Sachen aufzählen."</a:t>
             </a:r>
-            <a:endParaRPr lang="en-US" dirty="0"/>
           </a:p>
         </p:txBody>
       </p:sp>
@@ -958,7 +734,6 @@
               <a:t>Sprechnotiz:
 „Symptom vier: das Geld reicht nicht — und du weisst nicht wieviel du hast. Du sagst der Familie: diesen Monat können wir nicht auswärts essen. Innerlich fragst du dich: oh shit, wie viel hab ich noch auf dem Konto."</a:t>
             </a:r>
-            <a:endParaRPr lang="en-US" dirty="0"/>
           </a:p>
         </p:txBody>
       </p:sp>
@@ -1047,7 +822,6 @@
               <a:t>Sprechnotiz:
 „Hier ist der Schlüssel: beschäftigt ist nicht das gleiche wie wirksam. Du kannst 8 Stunden am Tag arbeiten und nichts bewegen. Oder 2 Stunden arbeiten und das richtige tun. Mama-CEO heisst: das Zweite. Nicht das Erste."</a:t>
             </a:r>
-            <a:endParaRPr lang="en-US" dirty="0"/>
           </a:p>
         </p:txBody>
       </p:sp>
@@ -1136,7 +910,6 @@
               <a:t>Sprechnotiz:
 „Die wichtigste Sache jetzt: die Schuld lassen wir hier. Hier auf dieser Folie. Du bist nicht faul. Du bist nicht zu wenig diszipliniert. Du hast nur kein passendes System. Das bauen wir in den nächsten 8 Wochen."</a:t>
             </a:r>
-            <a:endParaRPr lang="en-US" dirty="0"/>
           </a:p>
         </p:txBody>
       </p:sp>
@@ -1225,7 +998,6 @@
               <a:t>Outro:
 „Im Arbeitsblatt: Self-Check zu allen 4 Symptomen. Und ein Schuld-Loslass-Satz — den schreibst du wörtlich auf. ‚Ich lasse heute die Schuld los, dass…'. Wichtig dass das schwarz auf weiss steht. Jetzt wo wir die Lage ehrlich angeschaut haben, kommt in Lektion 2.2 das EINE Mantra das alles trägt. Bis dann."</a:t>
             </a:r>
-            <a:endParaRPr lang="en-US" dirty="0"/>
           </a:p>
         </p:txBody>
       </p:sp>
@@ -1298,6 +1070,11 @@
 <file path=ppt/slideMasters/slideMaster1.xml><?xml version="1.0" encoding="utf-8"?>
 <p:sldMaster xmlns:a="http://schemas.openxmlformats.org/drawingml/2006/main" xmlns:r="http://schemas.openxmlformats.org/officeDocument/2006/relationships" xmlns:p="http://schemas.openxmlformats.org/presentationml/2006/main">
   <p:cSld>
+    <p:bg>
+      <p:bgRef idx="1001">
+        <a:schemeClr val="bg1"/>
+      </p:bgRef>
+    </p:bg>
     <p:spTree>
       <p:nvGrpSpPr>
         <p:cNvPr id="1" name=""/>
@@ -1580,6 +1357,7 @@
         <a:solidFill>
           <a:srgbClr val="F1ECDD"/>
         </a:solidFill>
+        <a:effectLst/>
       </p:bgPr>
     </p:bg>
     <p:spTree>
@@ -1624,6 +1402,13 @@
             <a:prstDash val="solid"/>
           </a:ln>
         </p:spPr>
+        <p:txBody>
+          <a:bodyPr/>
+          <a:lstStyle/>
+          <a:p>
+            <a:endParaRPr lang="de-CH"/>
+          </a:p>
+        </p:txBody>
       </p:sp>
       <p:sp>
         <p:nvSpPr>
@@ -1646,11 +1431,11 @@
           <a:bodyPr wrap="square" rtlCol="0" anchor="ctr"/>
           <a:lstStyle/>
           <a:p>
-            <a:pPr indent="0" marL="0">
+            <a:pPr marL="0" indent="0">
               <a:buNone/>
             </a:pPr>
             <a:r>
-              <a:rPr lang="en-US" sz="1100" b="1" spc="400" kern="0" dirty="0">
+              <a:rPr lang="en-US" sz="1100" b="1" kern="0" spc="400" dirty="0">
                 <a:solidFill>
                   <a:srgbClr val="DC822E"/>
                 </a:solidFill>
@@ -1690,6 +1475,13 @@
             <a:prstDash val="solid"/>
           </a:ln>
         </p:spPr>
+        <p:txBody>
+          <a:bodyPr/>
+          <a:lstStyle/>
+          <a:p>
+            <a:endParaRPr lang="de-CH"/>
+          </a:p>
+        </p:txBody>
       </p:sp>
       <p:sp>
         <p:nvSpPr>
@@ -1712,7 +1504,7 @@
           <a:bodyPr wrap="square" lIns="0" tIns="0" rIns="0" bIns="0" rtlCol="0" anchor="t"/>
           <a:lstStyle/>
           <a:p>
-            <a:pPr indent="0" marL="0">
+            <a:pPr marL="0" indent="0">
               <a:buNone/>
             </a:pPr>
             <a:r>
@@ -1751,7 +1543,7 @@
           <a:bodyPr wrap="square" lIns="0" tIns="0" rIns="0" bIns="0" rtlCol="0" anchor="t"/>
           <a:lstStyle/>
           <a:p>
-            <a:pPr indent="0" marL="0">
+            <a:pPr marL="0" indent="0">
               <a:buNone/>
             </a:pPr>
             <a:r>
@@ -1763,12 +1555,144 @@
                 <a:ea typeface="Georgia" pitchFamily="34" charset="-122"/>
                 <a:cs typeface="Georgia" pitchFamily="34" charset="-120"/>
               </a:rPr>
-              <a:t>Du bist nicht faul. Du hast ein System-Problem.</a:t>
+              <a:t>Du bist nicht </a:t>
+            </a:r>
+            <a:r>
+              <a:rPr lang="en-US" sz="1800" i="1" dirty="0" err="1">
+                <a:solidFill>
+                  <a:srgbClr val="2C3E50"/>
+                </a:solidFill>
+                <a:latin typeface="Georgia" pitchFamily="34" charset="0"/>
+                <a:ea typeface="Georgia" pitchFamily="34" charset="-122"/>
+                <a:cs typeface="Georgia" pitchFamily="34" charset="-120"/>
+              </a:rPr>
+              <a:t>zu</a:t>
+            </a:r>
+            <a:r>
+              <a:rPr lang="en-US" sz="1800" i="1" dirty="0">
+                <a:solidFill>
+                  <a:srgbClr val="2C3E50"/>
+                </a:solidFill>
+                <a:latin typeface="Georgia" pitchFamily="34" charset="0"/>
+                <a:ea typeface="Georgia" pitchFamily="34" charset="-122"/>
+                <a:cs typeface="Georgia" pitchFamily="34" charset="-120"/>
+              </a:rPr>
+              <a:t> </a:t>
+            </a:r>
+            <a:r>
+              <a:rPr lang="en-US" sz="1800" i="1" dirty="0" err="1">
+                <a:solidFill>
+                  <a:srgbClr val="2C3E50"/>
+                </a:solidFill>
+                <a:latin typeface="Georgia" pitchFamily="34" charset="0"/>
+                <a:ea typeface="Georgia" pitchFamily="34" charset="-122"/>
+                <a:cs typeface="Georgia" pitchFamily="34" charset="-120"/>
+              </a:rPr>
+              <a:t>langsam</a:t>
+            </a:r>
+            <a:r>
+              <a:rPr lang="en-US" sz="1800" i="1" dirty="0">
+                <a:solidFill>
+                  <a:srgbClr val="2C3E50"/>
+                </a:solidFill>
+                <a:latin typeface="Georgia" pitchFamily="34" charset="0"/>
+                <a:ea typeface="Georgia" pitchFamily="34" charset="-122"/>
+                <a:cs typeface="Georgia" pitchFamily="34" charset="-120"/>
+              </a:rPr>
+              <a:t> </a:t>
+            </a:r>
+            <a:r>
+              <a:rPr lang="en-US" sz="1800" i="1" dirty="0" err="1">
+                <a:solidFill>
+                  <a:srgbClr val="2C3E50"/>
+                </a:solidFill>
+                <a:latin typeface="Georgia" pitchFamily="34" charset="0"/>
+                <a:ea typeface="Georgia" pitchFamily="34" charset="-122"/>
+                <a:cs typeface="Georgia" pitchFamily="34" charset="-120"/>
+              </a:rPr>
+              <a:t>oder</a:t>
+            </a:r>
+            <a:r>
+              <a:rPr lang="en-US" sz="1800" i="1" dirty="0">
+                <a:solidFill>
+                  <a:srgbClr val="2C3E50"/>
+                </a:solidFill>
+                <a:latin typeface="Georgia" pitchFamily="34" charset="0"/>
+                <a:ea typeface="Georgia" pitchFamily="34" charset="-122"/>
+                <a:cs typeface="Georgia" pitchFamily="34" charset="-120"/>
+              </a:rPr>
+              <a:t> </a:t>
+            </a:r>
+            <a:r>
+              <a:rPr lang="en-US" sz="1800" i="1" dirty="0" err="1">
+                <a:solidFill>
+                  <a:srgbClr val="2C3E50"/>
+                </a:solidFill>
+                <a:latin typeface="Georgia" pitchFamily="34" charset="0"/>
+                <a:ea typeface="Georgia" pitchFamily="34" charset="-122"/>
+                <a:cs typeface="Georgia" pitchFamily="34" charset="-120"/>
+              </a:rPr>
+              <a:t>zu</a:t>
+            </a:r>
+            <a:r>
+              <a:rPr lang="en-US" sz="1800" i="1" dirty="0">
+                <a:solidFill>
+                  <a:srgbClr val="2C3E50"/>
+                </a:solidFill>
+                <a:latin typeface="Georgia" pitchFamily="34" charset="0"/>
+                <a:ea typeface="Georgia" pitchFamily="34" charset="-122"/>
+                <a:cs typeface="Georgia" pitchFamily="34" charset="-120"/>
+              </a:rPr>
+              <a:t> </a:t>
+            </a:r>
+            <a:r>
+              <a:rPr lang="en-US" sz="1800" i="1" dirty="0" err="1">
+                <a:solidFill>
+                  <a:srgbClr val="2C3E50"/>
+                </a:solidFill>
+                <a:latin typeface="Georgia" pitchFamily="34" charset="0"/>
+                <a:ea typeface="Georgia" pitchFamily="34" charset="-122"/>
+                <a:cs typeface="Georgia" pitchFamily="34" charset="-120"/>
+              </a:rPr>
+              <a:t>wenig</a:t>
+            </a:r>
+            <a:r>
+              <a:rPr lang="en-US" sz="1800" i="1" dirty="0">
+                <a:solidFill>
+                  <a:srgbClr val="2C3E50"/>
+                </a:solidFill>
+                <a:latin typeface="Georgia" pitchFamily="34" charset="0"/>
+                <a:ea typeface="Georgia" pitchFamily="34" charset="-122"/>
+                <a:cs typeface="Georgia" pitchFamily="34" charset="-120"/>
+              </a:rPr>
+              <a:t> </a:t>
+            </a:r>
+            <a:r>
+              <a:rPr lang="en-US" sz="1800" i="1" dirty="0" err="1">
+                <a:solidFill>
+                  <a:srgbClr val="2C3E50"/>
+                </a:solidFill>
+                <a:latin typeface="Georgia" pitchFamily="34" charset="0"/>
+                <a:ea typeface="Georgia" pitchFamily="34" charset="-122"/>
+                <a:cs typeface="Georgia" pitchFamily="34" charset="-120"/>
+              </a:rPr>
+              <a:t>fleissig</a:t>
+            </a:r>
+            <a:r>
+              <a:rPr lang="en-US" sz="1800" i="1" dirty="0">
+                <a:solidFill>
+                  <a:srgbClr val="2C3E50"/>
+                </a:solidFill>
+                <a:latin typeface="Georgia" pitchFamily="34" charset="0"/>
+                <a:ea typeface="Georgia" pitchFamily="34" charset="-122"/>
+                <a:cs typeface="Georgia" pitchFamily="34" charset="-120"/>
+              </a:rPr>
+              <a:t>. Du hast ein System-Problem.</a:t>
             </a:r>
             <a:endParaRPr lang="en-US" sz="1800" dirty="0"/>
           </a:p>
           <a:p>
-            <a:pPr indent="0" marL="0">
+            <a:pPr marL="0" indent="0">
               <a:buNone/>
             </a:pPr>
             <a:r>
@@ -1785,7 +1709,7 @@
             <a:endParaRPr lang="en-US" sz="1800" dirty="0"/>
           </a:p>
           <a:p>
-            <a:pPr indent="0" marL="0">
+            <a:pPr marL="0" indent="0">
               <a:buNone/>
             </a:pPr>
             <a:r>
@@ -1802,7 +1726,7 @@
             <a:endParaRPr lang="en-US" sz="1800" dirty="0"/>
           </a:p>
           <a:p>
-            <a:pPr indent="0" marL="0">
+            <a:pPr marL="0" indent="0">
               <a:buNone/>
             </a:pPr>
             <a:r>
@@ -1841,7 +1765,7 @@
           <a:bodyPr wrap="square" rtlCol="0" anchor="ctr"/>
           <a:lstStyle/>
           <a:p>
-            <a:pPr indent="0" marL="0">
+            <a:pPr marL="0" indent="0">
               <a:buNone/>
             </a:pPr>
             <a:r>
@@ -1880,7 +1804,7 @@
           <a:bodyPr wrap="square" rtlCol="0" anchor="ctr"/>
           <a:lstStyle/>
           <a:p>
-            <a:pPr algn="r" indent="0" marL="0">
+            <a:pPr marL="0" indent="0" algn="r">
               <a:buNone/>
             </a:pPr>
             <a:r>
@@ -1914,6 +1838,7 @@
         <a:solidFill>
           <a:srgbClr val="FFFFFF"/>
         </a:solidFill>
+        <a:effectLst/>
       </p:bgPr>
     </p:bg>
     <p:spTree>
@@ -1951,7 +1876,7 @@
           <a:bodyPr wrap="square" lIns="0" tIns="0" rIns="0" bIns="0" rtlCol="0" anchor="t"/>
           <a:lstStyle/>
           <a:p>
-            <a:pPr indent="0" marL="0">
+            <a:pPr marL="0" indent="0">
               <a:buNone/>
             </a:pPr>
             <a:r>
@@ -1990,7 +1915,7 @@
           <a:bodyPr wrap="square" rtlCol="0" anchor="ctr"/>
           <a:lstStyle/>
           <a:p>
-            <a:pPr indent="0" marL="0">
+            <a:pPr marL="0" indent="0">
               <a:buNone/>
             </a:pPr>
             <a:r>
@@ -2029,7 +1954,7 @@
           <a:bodyPr wrap="square" lIns="0" tIns="0" rIns="0" bIns="0" rtlCol="0" anchor="ctr"/>
           <a:lstStyle/>
           <a:p>
-            <a:pPr indent="0" marL="0">
+            <a:pPr marL="0" indent="0">
               <a:buNone/>
             </a:pPr>
             <a:r>
@@ -2068,7 +1993,7 @@
           <a:bodyPr wrap="square" lIns="0" tIns="0" rIns="0" bIns="0" rtlCol="0" anchor="ctr"/>
           <a:lstStyle/>
           <a:p>
-            <a:pPr indent="0" marL="0">
+            <a:pPr marL="0" indent="0">
               <a:buNone/>
             </a:pPr>
             <a:r>
@@ -2080,7 +2005,29 @@
                 <a:ea typeface="Calibri" pitchFamily="34" charset="-122"/>
                 <a:cs typeface="Calibri" pitchFamily="34" charset="-120"/>
               </a:rPr>
-              <a:t>Du arbeitest noch 60–80% in deinem alten Job</a:t>
+              <a:t>Du arbeitest </a:t>
+            </a:r>
+            <a:r>
+              <a:rPr lang="en-US" sz="1600" dirty="0" err="1">
+                <a:solidFill>
+                  <a:srgbClr val="2C3E50"/>
+                </a:solidFill>
+                <a:latin typeface="Calibri" pitchFamily="34" charset="0"/>
+                <a:ea typeface="Calibri" pitchFamily="34" charset="-122"/>
+                <a:cs typeface="Calibri" pitchFamily="34" charset="-120"/>
+              </a:rPr>
+              <a:t>noch</a:t>
+            </a:r>
+            <a:r>
+              <a:rPr lang="en-US" sz="1600" dirty="0">
+                <a:solidFill>
+                  <a:srgbClr val="2C3E50"/>
+                </a:solidFill>
+                <a:latin typeface="Calibri" pitchFamily="34" charset="0"/>
+                <a:ea typeface="Calibri" pitchFamily="34" charset="-122"/>
+                <a:cs typeface="Calibri" pitchFamily="34" charset="-120"/>
+              </a:rPr>
+              <a:t> 40–60% in deinem alten Job</a:t>
             </a:r>
             <a:endParaRPr lang="en-US" sz="1600" dirty="0"/>
           </a:p>
@@ -2107,7 +2054,7 @@
           <a:bodyPr wrap="square" lIns="0" tIns="0" rIns="0" bIns="0" rtlCol="0" anchor="ctr"/>
           <a:lstStyle/>
           <a:p>
-            <a:pPr indent="0" marL="0">
+            <a:pPr marL="0" indent="0">
               <a:buNone/>
             </a:pPr>
             <a:r>
@@ -2146,7 +2093,7 @@
           <a:bodyPr wrap="square" lIns="0" tIns="0" rIns="0" bIns="0" rtlCol="0" anchor="ctr"/>
           <a:lstStyle/>
           <a:p>
-            <a:pPr indent="0" marL="0">
+            <a:pPr marL="0" indent="0">
               <a:buNone/>
             </a:pPr>
             <a:r>
@@ -2185,7 +2132,7 @@
           <a:bodyPr wrap="square" lIns="0" tIns="0" rIns="0" bIns="0" rtlCol="0" anchor="ctr"/>
           <a:lstStyle/>
           <a:p>
-            <a:pPr indent="0" marL="0">
+            <a:pPr marL="0" indent="0">
               <a:buNone/>
             </a:pPr>
             <a:r>
@@ -2224,7 +2171,7 @@
           <a:bodyPr wrap="square" lIns="0" tIns="0" rIns="0" bIns="0" rtlCol="0" anchor="ctr"/>
           <a:lstStyle/>
           <a:p>
-            <a:pPr indent="0" marL="0">
+            <a:pPr marL="0" indent="0">
               <a:buNone/>
             </a:pPr>
             <a:r>
@@ -2263,7 +2210,7 @@
           <a:bodyPr wrap="square" lIns="0" tIns="0" rIns="0" bIns="0" rtlCol="0" anchor="ctr"/>
           <a:lstStyle/>
           <a:p>
-            <a:pPr indent="0" marL="0">
+            <a:pPr marL="0" indent="0">
               <a:buNone/>
             </a:pPr>
             <a:r>
@@ -2302,7 +2249,7 @@
           <a:bodyPr wrap="square" lIns="0" tIns="0" rIns="0" bIns="0" rtlCol="0" anchor="ctr"/>
           <a:lstStyle/>
           <a:p>
-            <a:pPr indent="0" marL="0">
+            <a:pPr marL="0" indent="0">
               <a:buNone/>
             </a:pPr>
             <a:r>
@@ -2314,7 +2261,29 @@
                 <a:ea typeface="Calibri" pitchFamily="34" charset="-122"/>
                 <a:cs typeface="Calibri" pitchFamily="34" charset="-120"/>
               </a:rPr>
-              <a:t>„Diesen Monat können wir nicht auswärts essen."</a:t>
+              <a:t>Du hast </a:t>
+            </a:r>
+            <a:r>
+              <a:rPr lang="en-US" sz="1600" dirty="0" err="1">
+                <a:solidFill>
+                  <a:srgbClr val="2C3E50"/>
+                </a:solidFill>
+                <a:latin typeface="Calibri" pitchFamily="34" charset="0"/>
+                <a:ea typeface="Calibri" pitchFamily="34" charset="-122"/>
+                <a:cs typeface="Calibri" pitchFamily="34" charset="-120"/>
+              </a:rPr>
+              <a:t>finanziellen</a:t>
+            </a:r>
+            <a:r>
+              <a:rPr lang="en-US" sz="1600" dirty="0">
+                <a:solidFill>
+                  <a:srgbClr val="2C3E50"/>
+                </a:solidFill>
+                <a:latin typeface="Calibri" pitchFamily="34" charset="0"/>
+                <a:ea typeface="Calibri" pitchFamily="34" charset="-122"/>
+                <a:cs typeface="Calibri" pitchFamily="34" charset="-120"/>
+              </a:rPr>
+              <a:t> Druck</a:t>
             </a:r>
             <a:endParaRPr lang="en-US" sz="1600" dirty="0"/>
           </a:p>
@@ -2341,11 +2310,11 @@
           <a:bodyPr wrap="square" rtlCol="0" anchor="ctr"/>
           <a:lstStyle/>
           <a:p>
-            <a:pPr indent="0" marL="0">
+            <a:pPr marL="0" indent="0">
               <a:buNone/>
             </a:pPr>
             <a:r>
-              <a:rPr lang="en-US" sz="900" spc="200" kern="0" dirty="0">
+              <a:rPr lang="en-US" sz="900" kern="0" spc="200" dirty="0">
                 <a:solidFill>
                   <a:srgbClr val="7A8A95"/>
                 </a:solidFill>
@@ -2380,7 +2349,7 @@
           <a:bodyPr wrap="square" rtlCol="0" anchor="ctr"/>
           <a:lstStyle/>
           <a:p>
-            <a:pPr algn="r" indent="0" marL="0">
+            <a:pPr marL="0" indent="0" algn="r">
               <a:buNone/>
             </a:pPr>
             <a:r>
@@ -2414,6 +2383,7 @@
         <a:solidFill>
           <a:srgbClr val="12828C"/>
         </a:solidFill>
+        <a:effectLst/>
       </p:bgPr>
     </p:bg>
     <p:spTree>
@@ -2451,11 +2421,11 @@
           <a:bodyPr wrap="square" rtlCol="0" anchor="ctr"/>
           <a:lstStyle/>
           <a:p>
-            <a:pPr algn="ctr" indent="0" marL="0">
+            <a:pPr marL="0" indent="0" algn="ctr">
               <a:buNone/>
             </a:pPr>
             <a:r>
-              <a:rPr lang="en-US" sz="1100" b="1" spc="400" kern="0" dirty="0">
+              <a:rPr lang="en-US" sz="1100" b="1" kern="0" spc="400" dirty="0">
                 <a:solidFill>
                   <a:srgbClr val="DC822E"/>
                 </a:solidFill>
@@ -2495,6 +2465,13 @@
             <a:prstDash val="solid"/>
           </a:ln>
         </p:spPr>
+        <p:txBody>
+          <a:bodyPr/>
+          <a:lstStyle/>
+          <a:p>
+            <a:endParaRPr lang="de-CH"/>
+          </a:p>
+        </p:txBody>
       </p:sp>
       <p:sp>
         <p:nvSpPr>
@@ -2517,11 +2494,11 @@
           <a:bodyPr wrap="square" lIns="0" tIns="0" rIns="0" bIns="0" rtlCol="0" anchor="ctr"/>
           <a:lstStyle/>
           <a:p>
-            <a:pPr algn="ctr" indent="0" marL="0">
+            <a:pPr marL="0" indent="0" algn="ctr">
               <a:buNone/>
             </a:pPr>
             <a:r>
-              <a:rPr lang="en-US" sz="3600" b="1" dirty="0">
+              <a:rPr lang="en-US" sz="3200" b="1" dirty="0">
                 <a:solidFill>
                   <a:srgbClr val="F1ECDD"/>
                 </a:solidFill>
@@ -2529,16 +2506,148 @@
                 <a:ea typeface="Georgia" pitchFamily="34" charset="-122"/>
                 <a:cs typeface="Georgia" pitchFamily="34" charset="-120"/>
               </a:rPr>
-              <a:t>„Diesen Monat können wir</a:t>
-            </a:r>
-            <a:endParaRPr lang="en-US" sz="3600" dirty="0"/>
-          </a:p>
-          <a:p>
-            <a:pPr algn="ctr" indent="0" marL="0">
+              <a:t>„Ich </a:t>
+            </a:r>
+            <a:r>
+              <a:rPr lang="en-US" sz="3200" b="1" dirty="0" err="1">
+                <a:solidFill>
+                  <a:srgbClr val="F1ECDD"/>
+                </a:solidFill>
+                <a:latin typeface="Georgia" pitchFamily="34" charset="0"/>
+                <a:ea typeface="Georgia" pitchFamily="34" charset="-122"/>
+                <a:cs typeface="Georgia" pitchFamily="34" charset="-120"/>
+              </a:rPr>
+              <a:t>weiss</a:t>
+            </a:r>
+            <a:r>
+              <a:rPr lang="en-US" sz="3200" b="1" dirty="0">
+                <a:solidFill>
+                  <a:srgbClr val="F1ECDD"/>
+                </a:solidFill>
+                <a:latin typeface="Georgia" pitchFamily="34" charset="0"/>
+                <a:ea typeface="Georgia" pitchFamily="34" charset="-122"/>
+                <a:cs typeface="Georgia" pitchFamily="34" charset="-120"/>
+              </a:rPr>
+              <a:t> nicht, </a:t>
+            </a:r>
+            <a:r>
+              <a:rPr lang="en-US" sz="3200" b="1" dirty="0" err="1">
+                <a:solidFill>
+                  <a:srgbClr val="F1ECDD"/>
+                </a:solidFill>
+                <a:latin typeface="Georgia" pitchFamily="34" charset="0"/>
+                <a:ea typeface="Georgia" pitchFamily="34" charset="-122"/>
+                <a:cs typeface="Georgia" pitchFamily="34" charset="-120"/>
+              </a:rPr>
+              <a:t>wann</a:t>
+            </a:r>
+            <a:r>
+              <a:rPr lang="en-US" sz="3200" b="1" dirty="0">
+                <a:solidFill>
+                  <a:srgbClr val="F1ECDD"/>
+                </a:solidFill>
+                <a:latin typeface="Georgia" pitchFamily="34" charset="0"/>
+                <a:ea typeface="Georgia" pitchFamily="34" charset="-122"/>
+                <a:cs typeface="Georgia" pitchFamily="34" charset="-120"/>
+              </a:rPr>
+              <a:t> ich </a:t>
+            </a:r>
+            <a:r>
+              <a:rPr lang="en-US" sz="3200" b="1" dirty="0" err="1">
+                <a:solidFill>
+                  <a:srgbClr val="F1ECDD"/>
+                </a:solidFill>
+                <a:latin typeface="Georgia" pitchFamily="34" charset="0"/>
+                <a:ea typeface="Georgia" pitchFamily="34" charset="-122"/>
+                <a:cs typeface="Georgia" pitchFamily="34" charset="-120"/>
+              </a:rPr>
+              <a:t>mich</a:t>
+            </a:r>
+            <a:r>
+              <a:rPr lang="en-US" sz="3200" b="1" dirty="0">
+                <a:solidFill>
+                  <a:srgbClr val="F1ECDD"/>
+                </a:solidFill>
+                <a:latin typeface="Georgia" pitchFamily="34" charset="0"/>
+                <a:ea typeface="Georgia" pitchFamily="34" charset="-122"/>
+                <a:cs typeface="Georgia" pitchFamily="34" charset="-120"/>
+              </a:rPr>
+              <a:t> </a:t>
+            </a:r>
+            <a:r>
+              <a:rPr lang="en-US" sz="3200" b="1" dirty="0" err="1">
+                <a:solidFill>
+                  <a:srgbClr val="F1ECDD"/>
+                </a:solidFill>
+                <a:latin typeface="Georgia" pitchFamily="34" charset="0"/>
+                <a:ea typeface="Georgia" pitchFamily="34" charset="-122"/>
+                <a:cs typeface="Georgia" pitchFamily="34" charset="-120"/>
+              </a:rPr>
+              <a:t>noch</a:t>
+            </a:r>
+            <a:r>
+              <a:rPr lang="en-US" sz="3200" b="1" dirty="0">
+                <a:solidFill>
+                  <a:srgbClr val="F1ECDD"/>
+                </a:solidFill>
+                <a:latin typeface="Georgia" pitchFamily="34" charset="0"/>
+                <a:ea typeface="Georgia" pitchFamily="34" charset="-122"/>
+                <a:cs typeface="Georgia" pitchFamily="34" charset="-120"/>
+              </a:rPr>
+              <a:t> ums Business </a:t>
+            </a:r>
+            <a:r>
+              <a:rPr lang="en-US" sz="3200" b="1" dirty="0" err="1">
+                <a:solidFill>
+                  <a:srgbClr val="F1ECDD"/>
+                </a:solidFill>
+                <a:latin typeface="Georgia" pitchFamily="34" charset="0"/>
+                <a:ea typeface="Georgia" pitchFamily="34" charset="-122"/>
+                <a:cs typeface="Georgia" pitchFamily="34" charset="-120"/>
+              </a:rPr>
+              <a:t>kümmern</a:t>
+            </a:r>
+            <a:r>
+              <a:rPr lang="en-US" sz="3200" b="1" dirty="0">
+                <a:solidFill>
+                  <a:srgbClr val="F1ECDD"/>
+                </a:solidFill>
+                <a:latin typeface="Georgia" pitchFamily="34" charset="0"/>
+                <a:ea typeface="Georgia" pitchFamily="34" charset="-122"/>
+                <a:cs typeface="Georgia" pitchFamily="34" charset="-120"/>
+              </a:rPr>
+              <a:t> </a:t>
+            </a:r>
+            <a:r>
+              <a:rPr lang="en-US" sz="3200" b="1" dirty="0" err="1">
+                <a:solidFill>
+                  <a:srgbClr val="F1ECDD"/>
+                </a:solidFill>
+                <a:latin typeface="Georgia" pitchFamily="34" charset="0"/>
+                <a:ea typeface="Georgia" pitchFamily="34" charset="-122"/>
+                <a:cs typeface="Georgia" pitchFamily="34" charset="-120"/>
+              </a:rPr>
+              <a:t>soll</a:t>
+            </a:r>
+            <a:r>
+              <a:rPr lang="en-US" sz="3200" b="1" dirty="0">
+                <a:solidFill>
+                  <a:srgbClr val="F1ECDD"/>
+                </a:solidFill>
+                <a:latin typeface="Georgia" pitchFamily="34" charset="0"/>
+                <a:ea typeface="Georgia" pitchFamily="34" charset="-122"/>
+                <a:cs typeface="Georgia" pitchFamily="34" charset="-120"/>
+              </a:rPr>
+              <a:t>."</a:t>
+            </a:r>
+            <a:endParaRPr lang="en-US" sz="3200" dirty="0"/>
+          </a:p>
+          <a:p>
+            <a:pPr marL="0" indent="0" algn="ctr">
               <a:buNone/>
             </a:pPr>
             <a:r>
-              <a:rPr lang="en-US" sz="3600" b="1" dirty="0">
+              <a:rPr lang="en-US" sz="3200" b="1" dirty="0">
                 <a:solidFill>
                   <a:srgbClr val="F1ECDD"/>
                 </a:solidFill>
@@ -2546,16 +2655,10 @@
                 <a:ea typeface="Georgia" pitchFamily="34" charset="-122"/>
                 <a:cs typeface="Georgia" pitchFamily="34" charset="-120"/>
               </a:rPr>
-              <a:t>nicht auswärts essen."</a:t>
-            </a:r>
-            <a:endParaRPr lang="en-US" sz="3600" dirty="0"/>
-          </a:p>
-          <a:p>
-            <a:pPr algn="ctr" indent="0" marL="0">
-              <a:buNone/>
-            </a:pPr>
-            <a:r>
-              <a:rPr lang="en-US" sz="3600" b="1" dirty="0">
+              <a:t>Du arbeitest </a:t>
+            </a:r>
+            <a:r>
+              <a:rPr lang="en-US" sz="3200" b="1" dirty="0" err="1">
                 <a:solidFill>
                   <a:srgbClr val="F1ECDD"/>
                 </a:solidFill>
@@ -2563,9 +2666,20 @@
                 <a:ea typeface="Georgia" pitchFamily="34" charset="-122"/>
                 <a:cs typeface="Georgia" pitchFamily="34" charset="-120"/>
               </a:rPr>
-              <a:t>Du arbeitest noch 60–80% in deinem alten Job.</a:t>
-            </a:r>
-            <a:endParaRPr lang="en-US" sz="3600" dirty="0"/>
+              <a:t>noch</a:t>
+            </a:r>
+            <a:r>
+              <a:rPr lang="en-US" sz="3200" b="1" dirty="0">
+                <a:solidFill>
+                  <a:srgbClr val="F1ECDD"/>
+                </a:solidFill>
+                <a:latin typeface="Georgia" pitchFamily="34" charset="0"/>
+                <a:ea typeface="Georgia" pitchFamily="34" charset="-122"/>
+                <a:cs typeface="Georgia" pitchFamily="34" charset="-120"/>
+              </a:rPr>
+              <a:t> 40–60% in deinem alten Job.</a:t>
+            </a:r>
+            <a:endParaRPr lang="en-US" sz="3200" dirty="0"/>
           </a:p>
         </p:txBody>
       </p:sp>
@@ -2590,11 +2704,11 @@
           <a:bodyPr wrap="square" rtlCol="0" anchor="ctr"/>
           <a:lstStyle/>
           <a:p>
-            <a:pPr indent="0" marL="0">
+            <a:pPr marL="0" indent="0">
               <a:buNone/>
             </a:pPr>
             <a:r>
-              <a:rPr lang="en-US" sz="900" spc="200" kern="0" dirty="0">
+              <a:rPr lang="en-US" sz="900" kern="0" spc="200" dirty="0">
                 <a:solidFill>
                   <a:srgbClr val="F1ECDD"/>
                 </a:solidFill>
@@ -2629,7 +2743,7 @@
           <a:bodyPr wrap="square" rtlCol="0" anchor="ctr"/>
           <a:lstStyle/>
           <a:p>
-            <a:pPr algn="r" indent="0" marL="0">
+            <a:pPr marL="0" indent="0" algn="r">
               <a:buNone/>
             </a:pPr>
             <a:r>
@@ -2663,6 +2777,7 @@
         <a:solidFill>
           <a:srgbClr val="12828C"/>
         </a:solidFill>
+        <a:effectLst/>
       </p:bgPr>
     </p:bg>
     <p:spTree>
@@ -2700,11 +2815,11 @@
           <a:bodyPr wrap="square" rtlCol="0" anchor="ctr"/>
           <a:lstStyle/>
           <a:p>
-            <a:pPr algn="ctr" indent="0" marL="0">
+            <a:pPr marL="0" indent="0" algn="ctr">
               <a:buNone/>
             </a:pPr>
             <a:r>
-              <a:rPr lang="en-US" sz="1100" b="1" spc="400" kern="0" dirty="0">
+              <a:rPr lang="en-US" sz="1100" b="1" kern="0" spc="400" dirty="0">
                 <a:solidFill>
                   <a:srgbClr val="DC822E"/>
                 </a:solidFill>
@@ -2744,6 +2859,13 @@
             <a:prstDash val="solid"/>
           </a:ln>
         </p:spPr>
+        <p:txBody>
+          <a:bodyPr/>
+          <a:lstStyle/>
+          <a:p>
+            <a:endParaRPr lang="de-CH"/>
+          </a:p>
+        </p:txBody>
       </p:sp>
       <p:sp>
         <p:nvSpPr>
@@ -2766,7 +2888,7 @@
           <a:bodyPr wrap="square" lIns="0" tIns="0" rIns="0" bIns="0" rtlCol="0" anchor="ctr"/>
           <a:lstStyle/>
           <a:p>
-            <a:pPr algn="ctr" indent="0" marL="0">
+            <a:pPr marL="0" indent="0" algn="ctr">
               <a:buNone/>
             </a:pPr>
             <a:r>
@@ -2783,7 +2905,7 @@
             <a:endParaRPr lang="en-US" sz="3600" dirty="0"/>
           </a:p>
           <a:p>
-            <a:pPr algn="ctr" indent="0" marL="0">
+            <a:pPr marL="0" indent="0" algn="ctr">
               <a:buNone/>
             </a:pPr>
             <a:r>
@@ -2800,7 +2922,7 @@
             <a:endParaRPr lang="en-US" sz="3600" dirty="0"/>
           </a:p>
           <a:p>
-            <a:pPr algn="ctr" indent="0" marL="0">
+            <a:pPr marL="0" indent="0" algn="ctr">
               <a:buNone/>
             </a:pPr>
             <a:r>
@@ -2839,11 +2961,11 @@
           <a:bodyPr wrap="square" rtlCol="0" anchor="ctr"/>
           <a:lstStyle/>
           <a:p>
-            <a:pPr indent="0" marL="0">
+            <a:pPr marL="0" indent="0">
               <a:buNone/>
             </a:pPr>
             <a:r>
-              <a:rPr lang="en-US" sz="900" spc="200" kern="0" dirty="0">
+              <a:rPr lang="en-US" sz="900" kern="0" spc="200" dirty="0">
                 <a:solidFill>
                   <a:srgbClr val="F1ECDD"/>
                 </a:solidFill>
@@ -2878,7 +3000,7 @@
           <a:bodyPr wrap="square" rtlCol="0" anchor="ctr"/>
           <a:lstStyle/>
           <a:p>
-            <a:pPr algn="r" indent="0" marL="0">
+            <a:pPr marL="0" indent="0" algn="r">
               <a:buNone/>
             </a:pPr>
             <a:r>
@@ -2912,6 +3034,7 @@
         <a:solidFill>
           <a:srgbClr val="12828C"/>
         </a:solidFill>
+        <a:effectLst/>
       </p:bgPr>
     </p:bg>
     <p:spTree>
@@ -2936,7 +3059,7 @@
         </p:nvSpPr>
         <p:spPr>
           <a:xfrm>
-            <a:off x="548640" y="1188720"/>
+            <a:off x="548640" y="809045"/>
             <a:ext cx="8046720" cy="365760"/>
           </a:xfrm>
           <a:prstGeom prst="rect">
@@ -2949,11 +3072,11 @@
           <a:bodyPr wrap="square" rtlCol="0" anchor="ctr"/>
           <a:lstStyle/>
           <a:p>
-            <a:pPr algn="ctr" indent="0" marL="0">
+            <a:pPr marL="0" indent="0" algn="ctr">
               <a:buNone/>
             </a:pPr>
             <a:r>
-              <a:rPr lang="en-US" sz="1100" b="1" spc="400" kern="0" dirty="0">
+              <a:rPr lang="en-US" sz="1100" b="1" kern="0" spc="400" dirty="0">
                 <a:solidFill>
                   <a:srgbClr val="DC822E"/>
                 </a:solidFill>
@@ -2975,7 +3098,7 @@
         </p:nvSpPr>
         <p:spPr>
           <a:xfrm>
-            <a:off x="4297680" y="1691640"/>
+            <a:off x="4297680" y="1138229"/>
             <a:ext cx="548640" cy="36576"/>
           </a:xfrm>
           <a:prstGeom prst="rect">
@@ -2993,6 +3116,13 @@
             <a:prstDash val="solid"/>
           </a:ln>
         </p:spPr>
+        <p:txBody>
+          <a:bodyPr/>
+          <a:lstStyle/>
+          <a:p>
+            <a:endParaRPr lang="de-CH"/>
+          </a:p>
+        </p:txBody>
       </p:sp>
       <p:sp>
         <p:nvSpPr>
@@ -3015,11 +3145,11 @@
           <a:bodyPr wrap="square" lIns="0" tIns="0" rIns="0" bIns="0" rtlCol="0" anchor="ctr"/>
           <a:lstStyle/>
           <a:p>
-            <a:pPr algn="ctr" indent="0" marL="0">
+            <a:pPr marL="0" indent="0" algn="ctr">
               <a:buNone/>
             </a:pPr>
             <a:r>
-              <a:rPr lang="en-US" sz="3600" b="1" dirty="0">
+              <a:rPr lang="en-US" sz="3200" b="1" dirty="0">
                 <a:solidFill>
                   <a:srgbClr val="F1ECDD"/>
                 </a:solidFill>
@@ -3029,14 +3159,14 @@
               </a:rPr>
               <a:t>Du machst alles selbst.</a:t>
             </a:r>
-            <a:endParaRPr lang="en-US" sz="3600" dirty="0"/>
-          </a:p>
-          <a:p>
-            <a:pPr algn="ctr" indent="0" marL="0">
+            <a:endParaRPr lang="en-US" sz="3200" dirty="0"/>
+          </a:p>
+          <a:p>
+            <a:pPr marL="0" indent="0" algn="ctr">
               <a:buNone/>
             </a:pPr>
             <a:r>
-              <a:rPr lang="en-US" sz="3600" b="1" dirty="0">
+              <a:rPr lang="en-US" sz="3200" b="1" dirty="0">
                 <a:solidFill>
                   <a:srgbClr val="F1ECDD"/>
                 </a:solidFill>
@@ -3046,14 +3176,14 @@
               </a:rPr>
               <a:t>Posten · Antworten · Strategie · Reels · Buchhaltung.</a:t>
             </a:r>
-            <a:endParaRPr lang="en-US" sz="3600" dirty="0"/>
-          </a:p>
-          <a:p>
-            <a:pPr algn="ctr" indent="0" marL="0">
+            <a:endParaRPr lang="en-US" sz="3200" dirty="0"/>
+          </a:p>
+          <a:p>
+            <a:pPr marL="0" indent="0" algn="ctr">
               <a:buNone/>
             </a:pPr>
             <a:r>
-              <a:rPr lang="en-US" sz="3600" b="1" dirty="0">
+              <a:rPr lang="en-US" sz="3200" b="1" dirty="0">
                 <a:solidFill>
                   <a:srgbClr val="F1ECDD"/>
                 </a:solidFill>
@@ -3063,14 +3193,14 @@
               </a:rPr>
               <a:t>Bis 22 Uhr.</a:t>
             </a:r>
-            <a:endParaRPr lang="en-US" sz="3600" dirty="0"/>
-          </a:p>
-          <a:p>
-            <a:pPr algn="ctr" indent="0" marL="0">
+            <a:endParaRPr lang="en-US" sz="3200" dirty="0"/>
+          </a:p>
+          <a:p>
+            <a:pPr marL="0" indent="0" algn="ctr">
               <a:buNone/>
             </a:pPr>
             <a:r>
-              <a:rPr lang="en-US" sz="3600" b="1" dirty="0">
+              <a:rPr lang="en-US" sz="3200" b="1" dirty="0">
                 <a:solidFill>
                   <a:srgbClr val="F1ECDD"/>
                 </a:solidFill>
@@ -3080,7 +3210,7 @@
               </a:rPr>
               <a:t>Und am Abend weisst du nicht was du erreicht hast.</a:t>
             </a:r>
-            <a:endParaRPr lang="en-US" sz="3600" dirty="0"/>
+            <a:endParaRPr lang="en-US" sz="3200" dirty="0"/>
           </a:p>
         </p:txBody>
       </p:sp>
@@ -3105,11 +3235,11 @@
           <a:bodyPr wrap="square" rtlCol="0" anchor="ctr"/>
           <a:lstStyle/>
           <a:p>
-            <a:pPr indent="0" marL="0">
+            <a:pPr marL="0" indent="0">
               <a:buNone/>
             </a:pPr>
             <a:r>
-              <a:rPr lang="en-US" sz="900" spc="200" kern="0" dirty="0">
+              <a:rPr lang="en-US" sz="900" kern="0" spc="200" dirty="0">
                 <a:solidFill>
                   <a:srgbClr val="F1ECDD"/>
                 </a:solidFill>
@@ -3144,7 +3274,7 @@
           <a:bodyPr wrap="square" rtlCol="0" anchor="ctr"/>
           <a:lstStyle/>
           <a:p>
-            <a:pPr algn="r" indent="0" marL="0">
+            <a:pPr marL="0" indent="0" algn="r">
               <a:buNone/>
             </a:pPr>
             <a:r>
@@ -3178,6 +3308,7 @@
         <a:solidFill>
           <a:srgbClr val="12828C"/>
         </a:solidFill>
+        <a:effectLst/>
       </p:bgPr>
     </p:bg>
     <p:spTree>
@@ -3202,7 +3333,7 @@
         </p:nvSpPr>
         <p:spPr>
           <a:xfrm>
-            <a:off x="548640" y="1188720"/>
+            <a:off x="548640" y="480060"/>
             <a:ext cx="8046720" cy="365760"/>
           </a:xfrm>
           <a:prstGeom prst="rect">
@@ -3215,11 +3346,11 @@
           <a:bodyPr wrap="square" rtlCol="0" anchor="ctr"/>
           <a:lstStyle/>
           <a:p>
-            <a:pPr algn="ctr" indent="0" marL="0">
+            <a:pPr marL="0" indent="0" algn="ctr">
               <a:buNone/>
             </a:pPr>
             <a:r>
-              <a:rPr lang="en-US" sz="1100" b="1" spc="400" kern="0" dirty="0">
+              <a:rPr lang="en-US" sz="1100" b="1" kern="0" spc="400" dirty="0">
                 <a:solidFill>
                   <a:srgbClr val="DC822E"/>
                 </a:solidFill>
@@ -3241,7 +3372,7 @@
         </p:nvSpPr>
         <p:spPr>
           <a:xfrm>
-            <a:off x="4297680" y="1691640"/>
+            <a:off x="4297680" y="809244"/>
             <a:ext cx="548640" cy="36576"/>
           </a:xfrm>
           <a:prstGeom prst="rect">
@@ -3259,6 +3390,13 @@
             <a:prstDash val="solid"/>
           </a:ln>
         </p:spPr>
+        <p:txBody>
+          <a:bodyPr/>
+          <a:lstStyle/>
+          <a:p>
+            <a:endParaRPr lang="de-CH"/>
+          </a:p>
+        </p:txBody>
       </p:sp>
       <p:sp>
         <p:nvSpPr>
@@ -3268,7 +3406,7 @@
         </p:nvSpPr>
         <p:spPr>
           <a:xfrm>
-            <a:off x="548640" y="2011680"/>
+            <a:off x="548640" y="1680210"/>
             <a:ext cx="8046720" cy="2286000"/>
           </a:xfrm>
           <a:prstGeom prst="rect">
@@ -3281,7 +3419,7 @@
           <a:bodyPr wrap="square" lIns="0" tIns="0" rIns="0" bIns="0" rtlCol="0" anchor="ctr"/>
           <a:lstStyle/>
           <a:p>
-            <a:pPr algn="ctr" indent="0" marL="0">
+            <a:pPr marL="0" indent="0" algn="ctr">
               <a:buNone/>
             </a:pPr>
             <a:r>
@@ -3298,7 +3436,7 @@
             <a:endParaRPr lang="en-US" sz="3600" dirty="0"/>
           </a:p>
           <a:p>
-            <a:pPr algn="ctr" indent="0" marL="0">
+            <a:pPr marL="0" indent="0" algn="ctr">
               <a:buNone/>
             </a:pPr>
             <a:r>
@@ -3315,7 +3453,7 @@
             <a:endParaRPr lang="en-US" sz="3600" dirty="0"/>
           </a:p>
           <a:p>
-            <a:pPr algn="ctr" indent="0" marL="0">
+            <a:pPr marL="0" indent="0" algn="ctr">
               <a:buNone/>
             </a:pPr>
             <a:r>
@@ -3327,12 +3465,56 @@
                 <a:ea typeface="Georgia" pitchFamily="34" charset="-122"/>
                 <a:cs typeface="Georgia" pitchFamily="34" charset="-120"/>
               </a:rPr>
-              <a:t>Das Geld reicht nicht.</a:t>
+              <a:t>Das Geld </a:t>
+            </a:r>
+            <a:r>
+              <a:rPr lang="en-US" sz="3600" b="1" dirty="0" err="1">
+                <a:solidFill>
+                  <a:srgbClr val="F1ECDD"/>
+                </a:solidFill>
+                <a:latin typeface="Georgia" pitchFamily="34" charset="0"/>
+                <a:ea typeface="Georgia" pitchFamily="34" charset="-122"/>
+                <a:cs typeface="Georgia" pitchFamily="34" charset="-120"/>
+              </a:rPr>
+              <a:t>ist</a:t>
+            </a:r>
+            <a:r>
+              <a:rPr lang="en-US" sz="3600" b="1" dirty="0">
+                <a:solidFill>
+                  <a:srgbClr val="F1ECDD"/>
+                </a:solidFill>
+                <a:latin typeface="Georgia" pitchFamily="34" charset="0"/>
+                <a:ea typeface="Georgia" pitchFamily="34" charset="-122"/>
+                <a:cs typeface="Georgia" pitchFamily="34" charset="-120"/>
+              </a:rPr>
+              <a:t> immer </a:t>
+            </a:r>
+            <a:r>
+              <a:rPr lang="en-US" sz="3600" b="1" dirty="0" err="1">
+                <a:solidFill>
+                  <a:srgbClr val="F1ECDD"/>
+                </a:solidFill>
+                <a:latin typeface="Georgia" pitchFamily="34" charset="0"/>
+                <a:ea typeface="Georgia" pitchFamily="34" charset="-122"/>
+                <a:cs typeface="Georgia" pitchFamily="34" charset="-120"/>
+              </a:rPr>
+              <a:t>knapp</a:t>
+            </a:r>
+            <a:r>
+              <a:rPr lang="en-US" sz="3600" b="1" dirty="0">
+                <a:solidFill>
+                  <a:srgbClr val="F1ECDD"/>
+                </a:solidFill>
+                <a:latin typeface="Georgia" pitchFamily="34" charset="0"/>
+                <a:ea typeface="Georgia" pitchFamily="34" charset="-122"/>
+                <a:cs typeface="Georgia" pitchFamily="34" charset="-120"/>
+              </a:rPr>
+              <a:t>.</a:t>
             </a:r>
             <a:endParaRPr lang="en-US" sz="3600" dirty="0"/>
           </a:p>
           <a:p>
-            <a:pPr algn="ctr" indent="0" marL="0">
+            <a:pPr marL="0" indent="0" algn="ctr">
               <a:buNone/>
             </a:pPr>
             <a:r>
@@ -3371,11 +3553,11 @@
           <a:bodyPr wrap="square" rtlCol="0" anchor="ctr"/>
           <a:lstStyle/>
           <a:p>
-            <a:pPr indent="0" marL="0">
+            <a:pPr marL="0" indent="0">
               <a:buNone/>
             </a:pPr>
             <a:r>
-              <a:rPr lang="en-US" sz="900" spc="200" kern="0" dirty="0">
+              <a:rPr lang="en-US" sz="900" kern="0" spc="200" dirty="0">
                 <a:solidFill>
                   <a:srgbClr val="F1ECDD"/>
                 </a:solidFill>
@@ -3410,7 +3592,7 @@
           <a:bodyPr wrap="square" rtlCol="0" anchor="ctr"/>
           <a:lstStyle/>
           <a:p>
-            <a:pPr algn="r" indent="0" marL="0">
+            <a:pPr marL="0" indent="0" algn="r">
               <a:buNone/>
             </a:pPr>
             <a:r>
@@ -3444,6 +3626,7 @@
         <a:solidFill>
           <a:srgbClr val="FFFFFF"/>
         </a:solidFill>
+        <a:effectLst/>
       </p:bgPr>
     </p:bg>
     <p:spTree>
@@ -3481,7 +3664,7 @@
           <a:bodyPr wrap="square" lIns="0" tIns="0" rIns="0" bIns="0" rtlCol="0" anchor="t"/>
           <a:lstStyle/>
           <a:p>
-            <a:pPr indent="0" marL="0">
+            <a:pPr marL="0" indent="0">
               <a:buNone/>
             </a:pPr>
             <a:r>
@@ -3508,22 +3691,34 @@
           <p:nvPr>
             <p:extLst>
               <p:ext uri="{D42A27DB-BD31-4B8C-83A1-F6EECF244321}">
-                <p14:modId xmlns:p14="http://schemas.microsoft.com/office/powerpoint/2010/main" val="1579011935"/>
+                <p14:modId xmlns:p14="http://schemas.microsoft.com/office/powerpoint/2010/main" val="2587362429"/>
               </p:ext>
             </p:extLst>
           </p:nvPr>
         </p:nvGraphicFramePr>
         <p:xfrm>
-          <a:off x="548640" y="1920240"/>
-          <a:ext cx="8046720" cy="914400"/>
+          <a:off x="548640" y="1463040"/>
+          <a:ext cx="8046720" cy="2834640"/>
         </p:xfrm>
         <a:graphic>
           <a:graphicData uri="http://schemas.openxmlformats.org/drawingml/2006/table">
             <a:tbl>
               <a:tblPr/>
               <a:tblGrid>
-                <a:gridCol w="3200400"/>
-                <a:gridCol w="4846320"/>
+                <a:gridCol w="3200400">
+                  <a:extLst>
+                    <a:ext uri="{9D8B030D-6E8A-4147-A177-3AD203B41FA5}">
+                      <a16:colId xmlns:a16="http://schemas.microsoft.com/office/drawing/2014/main" val="20000"/>
+                    </a:ext>
+                  </a:extLst>
+                </a:gridCol>
+                <a:gridCol w="4846320">
+                  <a:extLst>
+                    <a:ext uri="{9D8B030D-6E8A-4147-A177-3AD203B41FA5}">
+                      <a16:colId xmlns:a16="http://schemas.microsoft.com/office/drawing/2014/main" val="20001"/>
+                    </a:ext>
+                  </a:extLst>
+                </a:gridCol>
               </a:tblGrid>
               <a:tr h="457200">
                 <a:tc>
@@ -3531,11 +3726,11 @@
                     <a:bodyPr/>
                     <a:lstStyle/>
                     <a:p>
-                      <a:pPr indent="0" marL="0">
+                      <a:pPr marL="0" indent="0">
                         <a:buNone/>
                       </a:pPr>
                       <a:r>
-                        <a:rPr lang="en-US" sz="1100" b="1" spc="300" kern="0" dirty="0">
+                        <a:rPr lang="en-US" sz="1100" b="1" kern="0" spc="300" dirty="0">
                           <a:solidFill>
                             <a:srgbClr val="7A8A95"/>
                           </a:solidFill>
@@ -3552,7 +3747,7 @@
                       </a:endParaRPr>
                     </a:p>
                   </a:txBody>
-                  <a:tcPr marL="91440" marR="91440" marT="45720" marB="45720">
+                  <a:tcPr>
                     <a:lnL w="0" cap="flat" cmpd="sng" algn="ctr">
                       <a:solidFill>
                         <a:srgbClr val="FFFFFF"/>
@@ -3599,11 +3794,11 @@
                     <a:bodyPr/>
                     <a:lstStyle/>
                     <a:p>
-                      <a:pPr indent="0" marL="0">
+                      <a:pPr marL="0" indent="0">
                         <a:buNone/>
                       </a:pPr>
                       <a:r>
-                        <a:rPr lang="en-US" sz="1100" b="1" spc="300" kern="0" dirty="0">
+                        <a:rPr lang="en-US" sz="1100" b="1" kern="0" spc="300" dirty="0">
                           <a:solidFill>
                             <a:srgbClr val="DC822E"/>
                           </a:solidFill>
@@ -3620,7 +3815,7 @@
                       </a:endParaRPr>
                     </a:p>
                   </a:txBody>
-                  <a:tcPr marL="91440" marR="91440" marT="45720" marB="45720">
+                  <a:tcPr>
                     <a:lnL w="0" cap="flat" cmpd="sng" algn="ctr">
                       <a:solidFill>
                         <a:srgbClr val="FFFFFF"/>
@@ -3662,6 +3857,11 @@
                     </a:solidFill>
                   </a:tcPr>
                 </a:tc>
+                <a:extLst>
+                  <a:ext uri="{0D108BD9-81ED-4DB2-BD59-A6C34878D82A}">
+                    <a16:rowId xmlns:a16="http://schemas.microsoft.com/office/drawing/2014/main" val="10000"/>
+                  </a:ext>
+                </a:extLst>
               </a:tr>
               <a:tr h="594360">
                 <a:tc>
@@ -3669,7 +3869,7 @@
                     <a:bodyPr/>
                     <a:lstStyle/>
                     <a:p>
-                      <a:pPr indent="0" marL="0">
+                      <a:pPr marL="0" indent="0">
                         <a:buNone/>
                       </a:pPr>
                       <a:r>
@@ -3690,7 +3890,7 @@
                       </a:endParaRPr>
                     </a:p>
                   </a:txBody>
-                  <a:tcPr marL="91440" marR="91440" marT="45720" marB="45720">
+                  <a:tcPr>
                     <a:lnL w="0" cap="flat" cmpd="sng" algn="ctr">
                       <a:solidFill>
                         <a:srgbClr val="FFFFFF"/>
@@ -3737,7 +3937,7 @@
                     <a:bodyPr/>
                     <a:lstStyle/>
                     <a:p>
-                      <a:pPr indent="0" marL="0">
+                      <a:pPr marL="0" indent="0">
                         <a:buNone/>
                       </a:pPr>
                       <a:r>
@@ -3758,7 +3958,7 @@
                       </a:endParaRPr>
                     </a:p>
                   </a:txBody>
-                  <a:tcPr marL="91440" marR="91440" marT="45720" marB="45720">
+                  <a:tcPr>
                     <a:lnL w="0" cap="flat" cmpd="sng" algn="ctr">
                       <a:solidFill>
                         <a:srgbClr val="FFFFFF"/>
@@ -3800,6 +4000,11 @@
                     </a:solidFill>
                   </a:tcPr>
                 </a:tc>
+                <a:extLst>
+                  <a:ext uri="{0D108BD9-81ED-4DB2-BD59-A6C34878D82A}">
+                    <a16:rowId xmlns:a16="http://schemas.microsoft.com/office/drawing/2014/main" val="10001"/>
+                  </a:ext>
+                </a:extLst>
               </a:tr>
               <a:tr h="594360">
                 <a:tc>
@@ -3807,7 +4012,7 @@
                     <a:bodyPr/>
                     <a:lstStyle/>
                     <a:p>
-                      <a:pPr indent="0" marL="0">
+                      <a:pPr marL="0" indent="0">
                         <a:buNone/>
                       </a:pPr>
                       <a:r>
@@ -3828,7 +4033,7 @@
                       </a:endParaRPr>
                     </a:p>
                   </a:txBody>
-                  <a:tcPr marL="91440" marR="91440" marT="45720" marB="45720">
+                  <a:tcPr>
                     <a:lnL w="0" cap="flat" cmpd="sng" algn="ctr">
                       <a:solidFill>
                         <a:srgbClr val="FFFFFF"/>
@@ -3875,7 +4080,7 @@
                     <a:bodyPr/>
                     <a:lstStyle/>
                     <a:p>
-                      <a:pPr indent="0" marL="0">
+                      <a:pPr marL="0" indent="0">
                         <a:buNone/>
                       </a:pPr>
                       <a:r>
@@ -3896,7 +4101,7 @@
                       </a:endParaRPr>
                     </a:p>
                   </a:txBody>
-                  <a:tcPr marL="91440" marR="91440" marT="45720" marB="45720">
+                  <a:tcPr>
                     <a:lnL w="0" cap="flat" cmpd="sng" algn="ctr">
                       <a:solidFill>
                         <a:srgbClr val="FFFFFF"/>
@@ -3938,6 +4143,11 @@
                     </a:solidFill>
                   </a:tcPr>
                 </a:tc>
+                <a:extLst>
+                  <a:ext uri="{0D108BD9-81ED-4DB2-BD59-A6C34878D82A}">
+                    <a16:rowId xmlns:a16="http://schemas.microsoft.com/office/drawing/2014/main" val="10002"/>
+                  </a:ext>
+                </a:extLst>
               </a:tr>
               <a:tr h="594360">
                 <a:tc>
@@ -3945,7 +4155,7 @@
                     <a:bodyPr/>
                     <a:lstStyle/>
                     <a:p>
-                      <a:pPr indent="0" marL="0">
+                      <a:pPr marL="0" indent="0">
                         <a:buNone/>
                       </a:pPr>
                       <a:r>
@@ -3966,7 +4176,7 @@
                       </a:endParaRPr>
                     </a:p>
                   </a:txBody>
-                  <a:tcPr marL="91440" marR="91440" marT="45720" marB="45720">
+                  <a:tcPr>
                     <a:lnL w="0" cap="flat" cmpd="sng" algn="ctr">
                       <a:solidFill>
                         <a:srgbClr val="FFFFFF"/>
@@ -4013,7 +4223,7 @@
                     <a:bodyPr/>
                     <a:lstStyle/>
                     <a:p>
-                      <a:pPr indent="0" marL="0">
+                      <a:pPr marL="0" indent="0">
                         <a:buNone/>
                       </a:pPr>
                       <a:r>
@@ -4034,7 +4244,7 @@
                       </a:endParaRPr>
                     </a:p>
                   </a:txBody>
-                  <a:tcPr marL="91440" marR="91440" marT="45720" marB="45720">
+                  <a:tcPr>
                     <a:lnL w="0" cap="flat" cmpd="sng" algn="ctr">
                       <a:solidFill>
                         <a:srgbClr val="FFFFFF"/>
@@ -4076,6 +4286,11 @@
                     </a:solidFill>
                   </a:tcPr>
                 </a:tc>
+                <a:extLst>
+                  <a:ext uri="{0D108BD9-81ED-4DB2-BD59-A6C34878D82A}">
+                    <a16:rowId xmlns:a16="http://schemas.microsoft.com/office/drawing/2014/main" val="10003"/>
+                  </a:ext>
+                </a:extLst>
               </a:tr>
               <a:tr h="594360">
                 <a:tc>
@@ -4083,7 +4298,7 @@
                     <a:bodyPr/>
                     <a:lstStyle/>
                     <a:p>
-                      <a:pPr indent="0" marL="0">
+                      <a:pPr marL="0" indent="0">
                         <a:buNone/>
                       </a:pPr>
                       <a:r>
@@ -4104,7 +4319,7 @@
                       </a:endParaRPr>
                     </a:p>
                   </a:txBody>
-                  <a:tcPr marL="91440" marR="91440" marT="45720" marB="45720">
+                  <a:tcPr>
                     <a:lnL w="0" cap="flat" cmpd="sng" algn="ctr">
                       <a:solidFill>
                         <a:srgbClr val="FFFFFF"/>
@@ -4151,7 +4366,7 @@
                     <a:bodyPr/>
                     <a:lstStyle/>
                     <a:p>
-                      <a:pPr indent="0" marL="0">
+                      <a:pPr marL="0" indent="0">
                         <a:buNone/>
                       </a:pPr>
                       <a:r>
@@ -4172,7 +4387,7 @@
                       </a:endParaRPr>
                     </a:p>
                   </a:txBody>
-                  <a:tcPr marL="91440" marR="91440" marT="45720" marB="45720">
+                  <a:tcPr>
                     <a:lnL w="0" cap="flat" cmpd="sng" algn="ctr">
                       <a:solidFill>
                         <a:srgbClr val="FFFFFF"/>
@@ -4214,6 +4429,11 @@
                     </a:solidFill>
                   </a:tcPr>
                 </a:tc>
+                <a:extLst>
+                  <a:ext uri="{0D108BD9-81ED-4DB2-BD59-A6C34878D82A}">
+                    <a16:rowId xmlns:a16="http://schemas.microsoft.com/office/drawing/2014/main" val="10004"/>
+                  </a:ext>
+                </a:extLst>
               </a:tr>
             </a:tbl>
           </a:graphicData>
@@ -4240,11 +4460,11 @@
           <a:bodyPr wrap="square" rtlCol="0" anchor="ctr"/>
           <a:lstStyle/>
           <a:p>
-            <a:pPr indent="0" marL="0">
+            <a:pPr marL="0" indent="0">
               <a:buNone/>
             </a:pPr>
             <a:r>
-              <a:rPr lang="en-US" sz="900" spc="200" kern="0" dirty="0">
+              <a:rPr lang="en-US" sz="900" kern="0" spc="200" dirty="0">
                 <a:solidFill>
                   <a:srgbClr val="7A8A95"/>
                 </a:solidFill>
@@ -4279,7 +4499,7 @@
           <a:bodyPr wrap="square" rtlCol="0" anchor="ctr"/>
           <a:lstStyle/>
           <a:p>
-            <a:pPr algn="r" indent="0" marL="0">
+            <a:pPr marL="0" indent="0" algn="r">
               <a:buNone/>
             </a:pPr>
             <a:r>
@@ -4313,6 +4533,7 @@
         <a:solidFill>
           <a:srgbClr val="12828C"/>
         </a:solidFill>
+        <a:effectLst/>
       </p:bgPr>
     </p:bg>
     <p:spTree>
@@ -4337,7 +4558,7 @@
         </p:nvSpPr>
         <p:spPr>
           <a:xfrm>
-            <a:off x="548640" y="1188720"/>
+            <a:off x="548640" y="383651"/>
             <a:ext cx="8046720" cy="365760"/>
           </a:xfrm>
           <a:prstGeom prst="rect">
@@ -4350,11 +4571,11 @@
           <a:bodyPr wrap="square" rtlCol="0" anchor="ctr"/>
           <a:lstStyle/>
           <a:p>
-            <a:pPr algn="ctr" indent="0" marL="0">
+            <a:pPr marL="0" indent="0" algn="ctr">
               <a:buNone/>
             </a:pPr>
             <a:r>
-              <a:rPr lang="en-US" sz="1100" b="1" spc="400" kern="0" dirty="0">
+              <a:rPr lang="en-US" sz="1100" b="1" kern="0" spc="400" dirty="0">
                 <a:solidFill>
                   <a:srgbClr val="DC822E"/>
                 </a:solidFill>
@@ -4376,7 +4597,7 @@
         </p:nvSpPr>
         <p:spPr>
           <a:xfrm>
-            <a:off x="4297680" y="1691640"/>
+            <a:off x="4297680" y="704884"/>
             <a:ext cx="548640" cy="36576"/>
           </a:xfrm>
           <a:prstGeom prst="rect">
@@ -4394,6 +4615,13 @@
             <a:prstDash val="solid"/>
           </a:ln>
         </p:spPr>
+        <p:txBody>
+          <a:bodyPr/>
+          <a:lstStyle/>
+          <a:p>
+            <a:endParaRPr lang="de-CH"/>
+          </a:p>
+        </p:txBody>
       </p:sp>
       <p:sp>
         <p:nvSpPr>
@@ -4403,7 +4631,7 @@
         </p:nvSpPr>
         <p:spPr>
           <a:xfrm>
-            <a:off x="548640" y="2011680"/>
+            <a:off x="548640" y="1665798"/>
             <a:ext cx="8046720" cy="2286000"/>
           </a:xfrm>
           <a:prstGeom prst="rect">
@@ -4416,7 +4644,7 @@
           <a:bodyPr wrap="square" lIns="0" tIns="0" rIns="0" bIns="0" rtlCol="0" anchor="ctr"/>
           <a:lstStyle/>
           <a:p>
-            <a:pPr algn="ctr" indent="0" marL="0">
+            <a:pPr marL="0" indent="0" algn="ctr">
               <a:buNone/>
             </a:pPr>
             <a:r>
@@ -4428,12 +4656,78 @@
                 <a:ea typeface="Georgia" pitchFamily="34" charset="-122"/>
                 <a:cs typeface="Georgia" pitchFamily="34" charset="-120"/>
               </a:rPr>
-              <a:t>Du bist nicht faul.</a:t>
+              <a:t>Du </a:t>
+            </a:r>
+            <a:r>
+              <a:rPr lang="en-US" sz="3600" b="1" dirty="0" err="1">
+                <a:solidFill>
+                  <a:srgbClr val="F1ECDD"/>
+                </a:solidFill>
+                <a:latin typeface="Georgia" pitchFamily="34" charset="0"/>
+                <a:ea typeface="Georgia" pitchFamily="34" charset="-122"/>
+                <a:cs typeface="Georgia" pitchFamily="34" charset="-120"/>
+              </a:rPr>
+              <a:t>bist</a:t>
+            </a:r>
+            <a:r>
+              <a:rPr lang="en-US" sz="3600" b="1" dirty="0">
+                <a:solidFill>
+                  <a:srgbClr val="F1ECDD"/>
+                </a:solidFill>
+                <a:latin typeface="Georgia" pitchFamily="34" charset="0"/>
+                <a:ea typeface="Georgia" pitchFamily="34" charset="-122"/>
+                <a:cs typeface="Georgia" pitchFamily="34" charset="-120"/>
+              </a:rPr>
+              <a:t> nicht </a:t>
+            </a:r>
+            <a:r>
+              <a:rPr lang="en-US" sz="3600" b="1" dirty="0" err="1">
+                <a:solidFill>
+                  <a:srgbClr val="F1ECDD"/>
+                </a:solidFill>
+                <a:latin typeface="Georgia" pitchFamily="34" charset="0"/>
+                <a:ea typeface="Georgia" pitchFamily="34" charset="-122"/>
+                <a:cs typeface="Georgia" pitchFamily="34" charset="-120"/>
+              </a:rPr>
+              <a:t>zu</a:t>
+            </a:r>
+            <a:r>
+              <a:rPr lang="en-US" sz="3600" b="1" dirty="0">
+                <a:solidFill>
+                  <a:srgbClr val="F1ECDD"/>
+                </a:solidFill>
+                <a:latin typeface="Georgia" pitchFamily="34" charset="0"/>
+                <a:ea typeface="Georgia" pitchFamily="34" charset="-122"/>
+                <a:cs typeface="Georgia" pitchFamily="34" charset="-120"/>
+              </a:rPr>
+              <a:t> </a:t>
+            </a:r>
+            <a:r>
+              <a:rPr lang="en-US" sz="3600" b="1" dirty="0" err="1">
+                <a:solidFill>
+                  <a:srgbClr val="F1ECDD"/>
+                </a:solidFill>
+                <a:latin typeface="Georgia" pitchFamily="34" charset="0"/>
+                <a:ea typeface="Georgia" pitchFamily="34" charset="-122"/>
+                <a:cs typeface="Georgia" pitchFamily="34" charset="-120"/>
+              </a:rPr>
+              <a:t>wenig</a:t>
+            </a:r>
+            <a:r>
+              <a:rPr lang="en-US" sz="3600" b="1" dirty="0">
+                <a:solidFill>
+                  <a:srgbClr val="F1ECDD"/>
+                </a:solidFill>
+                <a:latin typeface="Georgia" pitchFamily="34" charset="0"/>
+                <a:ea typeface="Georgia" pitchFamily="34" charset="-122"/>
+                <a:cs typeface="Georgia" pitchFamily="34" charset="-120"/>
+              </a:rPr>
+              <a:t> gut.</a:t>
             </a:r>
             <a:endParaRPr lang="en-US" sz="3600" dirty="0"/>
           </a:p>
           <a:p>
-            <a:pPr algn="ctr" indent="0" marL="0">
+            <a:pPr marL="0" indent="0" algn="ctr">
               <a:buNone/>
             </a:pPr>
             <a:r>
@@ -4450,7 +4744,7 @@
             <a:endParaRPr lang="en-US" sz="3600" dirty="0"/>
           </a:p>
           <a:p>
-            <a:pPr algn="ctr" indent="0" marL="0">
+            <a:pPr marL="0" indent="0" algn="ctr">
               <a:buNone/>
             </a:pPr>
             <a:r>
@@ -4489,11 +4783,11 @@
           <a:bodyPr wrap="square" rtlCol="0" anchor="ctr"/>
           <a:lstStyle/>
           <a:p>
-            <a:pPr indent="0" marL="0">
+            <a:pPr marL="0" indent="0">
               <a:buNone/>
             </a:pPr>
             <a:r>
-              <a:rPr lang="en-US" sz="900" spc="200" kern="0" dirty="0">
+              <a:rPr lang="en-US" sz="900" kern="0" spc="200" dirty="0">
                 <a:solidFill>
                   <a:srgbClr val="F1ECDD"/>
                 </a:solidFill>
@@ -4528,7 +4822,7 @@
           <a:bodyPr wrap="square" rtlCol="0" anchor="ctr"/>
           <a:lstStyle/>
           <a:p>
-            <a:pPr algn="r" indent="0" marL="0">
+            <a:pPr marL="0" indent="0" algn="r">
               <a:buNone/>
             </a:pPr>
             <a:r>
@@ -4562,6 +4856,7 @@
         <a:solidFill>
           <a:srgbClr val="FFFFFF"/>
         </a:solidFill>
+        <a:effectLst/>
       </p:bgPr>
     </p:bg>
     <p:spTree>
@@ -4599,7 +4894,7 @@
           <a:bodyPr wrap="square" lIns="0" tIns="0" rIns="0" bIns="0" rtlCol="0" anchor="t"/>
           <a:lstStyle/>
           <a:p>
-            <a:pPr indent="0" marL="0">
+            <a:pPr marL="0" indent="0">
               <a:buNone/>
             </a:pPr>
             <a:r>
@@ -4643,6 +4938,13 @@
             <a:prstDash val="solid"/>
           </a:ln>
         </p:spPr>
+        <p:txBody>
+          <a:bodyPr/>
+          <a:lstStyle/>
+          <a:p>
+            <a:endParaRPr lang="de-CH"/>
+          </a:p>
+        </p:txBody>
       </p:sp>
       <p:sp>
         <p:nvSpPr>
@@ -4670,6 +4972,13 @@
             <a:prstDash val="solid"/>
           </a:ln>
         </p:spPr>
+        <p:txBody>
+          <a:bodyPr/>
+          <a:lstStyle/>
+          <a:p>
+            <a:endParaRPr lang="de-CH"/>
+          </a:p>
+        </p:txBody>
       </p:sp>
       <p:sp>
         <p:nvSpPr>
@@ -4692,11 +5001,11 @@
           <a:bodyPr wrap="square" rtlCol="0" anchor="ctr"/>
           <a:lstStyle/>
           <a:p>
-            <a:pPr indent="0" marL="0">
+            <a:pPr marL="0" indent="0">
               <a:buNone/>
             </a:pPr>
             <a:r>
-              <a:rPr lang="en-US" sz="1000" b="1" spc="300" kern="0" dirty="0">
+              <a:rPr lang="en-US" sz="1000" b="1" kern="0" spc="300" dirty="0">
                 <a:solidFill>
                   <a:srgbClr val="0D6168"/>
                 </a:solidFill>
@@ -4731,7 +5040,7 @@
           <a:bodyPr wrap="square" lIns="0" tIns="0" rIns="0" bIns="0" rtlCol="0" anchor="t"/>
           <a:lstStyle/>
           <a:p>
-            <a:pPr indent="0" marL="0">
+            <a:pPr marL="0" indent="0">
               <a:buNone/>
             </a:pPr>
             <a:r>
@@ -4860,6 +5169,13 @@
             <a:prstDash val="solid"/>
           </a:ln>
         </p:spPr>
+        <p:txBody>
+          <a:bodyPr/>
+          <a:lstStyle/>
+          <a:p>
+            <a:endParaRPr lang="de-CH"/>
+          </a:p>
+        </p:txBody>
       </p:sp>
       <p:sp>
         <p:nvSpPr>
@@ -4887,6 +5203,13 @@
             <a:prstDash val="solid"/>
           </a:ln>
         </p:spPr>
+        <p:txBody>
+          <a:bodyPr/>
+          <a:lstStyle/>
+          <a:p>
+            <a:endParaRPr lang="de-CH"/>
+          </a:p>
+        </p:txBody>
       </p:sp>
       <p:sp>
         <p:nvSpPr>
@@ -4909,11 +5232,11 @@
           <a:bodyPr wrap="square" rtlCol="0" anchor="ctr"/>
           <a:lstStyle/>
           <a:p>
-            <a:pPr indent="0" marL="0">
+            <a:pPr marL="0" indent="0">
               <a:buNone/>
             </a:pPr>
             <a:r>
-              <a:rPr lang="en-US" sz="1000" b="1" spc="300" kern="0" dirty="0">
+              <a:rPr lang="en-US" sz="1000" b="1" kern="0" spc="300" dirty="0">
                 <a:solidFill>
                   <a:srgbClr val="DC822E"/>
                 </a:solidFill>
@@ -4948,7 +5271,7 @@
           <a:bodyPr wrap="square" lIns="0" tIns="0" rIns="0" bIns="0" rtlCol="0" anchor="t"/>
           <a:lstStyle/>
           <a:p>
-            <a:pPr indent="0" marL="0">
+            <a:pPr marL="0" indent="0">
               <a:buNone/>
             </a:pPr>
             <a:r>
@@ -5072,11 +5395,11 @@
           <a:bodyPr wrap="square" rtlCol="0" anchor="ctr"/>
           <a:lstStyle/>
           <a:p>
-            <a:pPr indent="0" marL="0">
+            <a:pPr marL="0" indent="0">
               <a:buNone/>
             </a:pPr>
             <a:r>
-              <a:rPr lang="en-US" sz="900" spc="200" kern="0" dirty="0">
+              <a:rPr lang="en-US" sz="900" kern="0" spc="200" dirty="0">
                 <a:solidFill>
                   <a:srgbClr val="7A8A95"/>
                 </a:solidFill>
@@ -5111,7 +5434,7 @@
           <a:bodyPr wrap="square" rtlCol="0" anchor="ctr"/>
           <a:lstStyle/>
           <a:p>
-            <a:pPr algn="r" indent="0" marL="0">
+            <a:pPr marL="0" indent="0" algn="r">
               <a:buNone/>
             </a:pPr>
             <a:r>
@@ -5430,4 +5753,319 @@
     </a:ext>
   </a:extLst>
 </a:theme>
+</file>
+
+<file path=ppt/theme/theme2.xml><?xml version="1.0" encoding="utf-8"?>
+<a:theme xmlns:a="http://schemas.openxmlformats.org/drawingml/2006/main" name="Office">
+  <a:themeElements>
+    <a:clrScheme name="Office">
+      <a:dk1>
+        <a:sysClr val="windowText" lastClr="000000"/>
+      </a:dk1>
+      <a:lt1>
+        <a:sysClr val="window" lastClr="FFFFFF"/>
+      </a:lt1>
+      <a:dk2>
+        <a:srgbClr val="0E2841"/>
+      </a:dk2>
+      <a:lt2>
+        <a:srgbClr val="E8E8E8"/>
+      </a:lt2>
+      <a:accent1>
+        <a:srgbClr val="156082"/>
+      </a:accent1>
+      <a:accent2>
+        <a:srgbClr val="E97132"/>
+      </a:accent2>
+      <a:accent3>
+        <a:srgbClr val="196B24"/>
+      </a:accent3>
+      <a:accent4>
+        <a:srgbClr val="0F9ED5"/>
+      </a:accent4>
+      <a:accent5>
+        <a:srgbClr val="A02B93"/>
+      </a:accent5>
+      <a:accent6>
+        <a:srgbClr val="4EA72E"/>
+      </a:accent6>
+      <a:hlink>
+        <a:srgbClr val="467886"/>
+      </a:hlink>
+      <a:folHlink>
+        <a:srgbClr val="96607D"/>
+      </a:folHlink>
+    </a:clrScheme>
+    <a:fontScheme name="Office">
+      <a:majorFont>
+        <a:latin typeface="Aptos Display" panose="02110004020202020204"/>
+        <a:ea typeface=""/>
+        <a:cs typeface=""/>
+        <a:font script="Jpan" typeface="游ゴシック Light"/>
+        <a:font script="Hang" typeface="맑은 고딕"/>
+        <a:font script="Hans" typeface="等线 Light"/>
+        <a:font script="Hant" typeface="新細明體"/>
+        <a:font script="Arab" typeface="Times New Roman"/>
+        <a:font script="Hebr" typeface="Times New Roman"/>
+        <a:font script="Thai" typeface="Angsana New"/>
+        <a:font script="Ethi" typeface="Nyala"/>
+        <a:font script="Beng" typeface="Vrinda"/>
+        <a:font script="Gujr" typeface="Shruti"/>
+        <a:font script="Khmr" typeface="MoolBoran"/>
+        <a:font script="Knda" typeface="Tunga"/>
+        <a:font script="Guru" typeface="Raavi"/>
+        <a:font script="Cans" typeface="Euphemia"/>
+        <a:font script="Cher" typeface="Plantagenet Cherokee"/>
+        <a:font script="Yiii" typeface="Microsoft Yi Baiti"/>
+        <a:font script="Tibt" typeface="Microsoft Himalaya"/>
+        <a:font script="Thaa" typeface="MV Boli"/>
+        <a:font script="Deva" typeface="Mangal"/>
+        <a:font script="Telu" typeface="Gautami"/>
+        <a:font script="Taml" typeface="Latha"/>
+        <a:font script="Syrc" typeface="Estrangelo Edessa"/>
+        <a:font script="Orya" typeface="Kalinga"/>
+        <a:font script="Mlym" typeface="Kartika"/>
+        <a:font script="Laoo" typeface="DokChampa"/>
+        <a:font script="Sinh" typeface="Iskoola Pota"/>
+        <a:font script="Mong" typeface="Mongolian Baiti"/>
+        <a:font script="Viet" typeface="Times New Roman"/>
+        <a:font script="Uigh" typeface="Microsoft Uighur"/>
+        <a:font script="Geor" typeface="Sylfaen"/>
+        <a:font script="Armn" typeface="Arial"/>
+        <a:font script="Bugi" typeface="Leelawadee UI"/>
+        <a:font script="Bopo" typeface="Microsoft JhengHei"/>
+        <a:font script="Java" typeface="Javanese Text"/>
+        <a:font script="Lisu" typeface="Segoe UI"/>
+        <a:font script="Mymr" typeface="Myanmar Text"/>
+        <a:font script="Nkoo" typeface="Ebrima"/>
+        <a:font script="Olck" typeface="Nirmala UI"/>
+        <a:font script="Osma" typeface="Ebrima"/>
+        <a:font script="Phag" typeface="Phagspa"/>
+        <a:font script="Syrn" typeface="Estrangelo Edessa"/>
+        <a:font script="Syrj" typeface="Estrangelo Edessa"/>
+        <a:font script="Syre" typeface="Estrangelo Edessa"/>
+        <a:font script="Sora" typeface="Nirmala UI"/>
+        <a:font script="Tale" typeface="Microsoft Tai Le"/>
+        <a:font script="Talu" typeface="Microsoft New Tai Lue"/>
+        <a:font script="Tfng" typeface="Ebrima"/>
+      </a:majorFont>
+      <a:minorFont>
+        <a:latin typeface="Aptos" panose="02110004020202020204"/>
+        <a:ea typeface=""/>
+        <a:cs typeface=""/>
+        <a:font script="Jpan" typeface="游ゴシック"/>
+        <a:font script="Hang" typeface="맑은 고딕"/>
+        <a:font script="Hans" typeface="等线"/>
+        <a:font script="Hant" typeface="新細明體"/>
+        <a:font script="Arab" typeface="Arial"/>
+        <a:font script="Hebr" typeface="Arial"/>
+        <a:font script="Thai" typeface="Cordia New"/>
+        <a:font script="Ethi" typeface="Nyala"/>
+        <a:font script="Beng" typeface="Vrinda"/>
+        <a:font script="Gujr" typeface="Shruti"/>
+        <a:font script="Khmr" typeface="DaunPenh"/>
+        <a:font script="Knda" typeface="Tunga"/>
+        <a:font script="Guru" typeface="Raavi"/>
+        <a:font script="Cans" typeface="Euphemia"/>
+        <a:font script="Cher" typeface="Plantagenet Cherokee"/>
+        <a:font script="Yiii" typeface="Microsoft Yi Baiti"/>
+        <a:font script="Tibt" typeface="Microsoft Himalaya"/>
+        <a:font script="Thaa" typeface="MV Boli"/>
+        <a:font script="Deva" typeface="Mangal"/>
+        <a:font script="Telu" typeface="Gautami"/>
+        <a:font script="Taml" typeface="Latha"/>
+        <a:font script="Syrc" typeface="Estrangelo Edessa"/>
+        <a:font script="Orya" typeface="Kalinga"/>
+        <a:font script="Mlym" typeface="Kartika"/>
+        <a:font script="Laoo" typeface="DokChampa"/>
+        <a:font script="Sinh" typeface="Iskoola Pota"/>
+        <a:font script="Mong" typeface="Mongolian Baiti"/>
+        <a:font script="Viet" typeface="Arial"/>
+        <a:font script="Uigh" typeface="Microsoft Uighur"/>
+        <a:font script="Geor" typeface="Sylfaen"/>
+        <a:font script="Armn" typeface="Arial"/>
+        <a:font script="Bugi" typeface="Leelawadee UI"/>
+        <a:font script="Bopo" typeface="Microsoft JhengHei"/>
+        <a:font script="Java" typeface="Javanese Text"/>
+        <a:font script="Lisu" typeface="Segoe UI"/>
+        <a:font script="Mymr" typeface="Myanmar Text"/>
+        <a:font script="Nkoo" typeface="Ebrima"/>
+        <a:font script="Olck" typeface="Nirmala UI"/>
+        <a:font script="Osma" typeface="Ebrima"/>
+        <a:font script="Phag" typeface="Phagspa"/>
+        <a:font script="Syrn" typeface="Estrangelo Edessa"/>
+        <a:font script="Syrj" typeface="Estrangelo Edessa"/>
+        <a:font script="Syre" typeface="Estrangelo Edessa"/>
+        <a:font script="Sora" typeface="Nirmala UI"/>
+        <a:font script="Tale" typeface="Microsoft Tai Le"/>
+        <a:font script="Talu" typeface="Microsoft New Tai Lue"/>
+        <a:font script="Tfng" typeface="Ebrima"/>
+      </a:minorFont>
+    </a:fontScheme>
+    <a:fmtScheme name="Office">
+      <a:fillStyleLst>
+        <a:solidFill>
+          <a:schemeClr val="phClr"/>
+        </a:solidFill>
+        <a:gradFill rotWithShape="1">
+          <a:gsLst>
+            <a:gs pos="0">
+              <a:schemeClr val="phClr">
+                <a:lumMod val="110000"/>
+                <a:satMod val="105000"/>
+                <a:tint val="67000"/>
+              </a:schemeClr>
+            </a:gs>
+            <a:gs pos="50000">
+              <a:schemeClr val="phClr">
+                <a:lumMod val="105000"/>
+                <a:satMod val="103000"/>
+                <a:tint val="73000"/>
+              </a:schemeClr>
+            </a:gs>
+            <a:gs pos="100000">
+              <a:schemeClr val="phClr">
+                <a:lumMod val="105000"/>
+                <a:satMod val="109000"/>
+                <a:tint val="81000"/>
+              </a:schemeClr>
+            </a:gs>
+          </a:gsLst>
+          <a:lin ang="5400000" scaled="0"/>
+        </a:gradFill>
+        <a:gradFill rotWithShape="1">
+          <a:gsLst>
+            <a:gs pos="0">
+              <a:schemeClr val="phClr">
+                <a:satMod val="103000"/>
+                <a:lumMod val="102000"/>
+                <a:tint val="94000"/>
+              </a:schemeClr>
+            </a:gs>
+            <a:gs pos="50000">
+              <a:schemeClr val="phClr">
+                <a:satMod val="110000"/>
+                <a:lumMod val="100000"/>
+                <a:shade val="100000"/>
+              </a:schemeClr>
+            </a:gs>
+            <a:gs pos="100000">
+              <a:schemeClr val="phClr">
+                <a:lumMod val="99000"/>
+                <a:satMod val="120000"/>
+                <a:shade val="78000"/>
+              </a:schemeClr>
+            </a:gs>
+          </a:gsLst>
+          <a:lin ang="5400000" scaled="0"/>
+        </a:gradFill>
+      </a:fillStyleLst>
+      <a:lnStyleLst>
+        <a:ln w="12700" cap="flat" cmpd="sng" algn="ctr">
+          <a:solidFill>
+            <a:schemeClr val="phClr"/>
+          </a:solidFill>
+          <a:prstDash val="solid"/>
+          <a:miter lim="800000"/>
+        </a:ln>
+        <a:ln w="19050" cap="flat" cmpd="sng" algn="ctr">
+          <a:solidFill>
+            <a:schemeClr val="phClr"/>
+          </a:solidFill>
+          <a:prstDash val="solid"/>
+          <a:miter lim="800000"/>
+        </a:ln>
+        <a:ln w="25400" cap="flat" cmpd="sng" algn="ctr">
+          <a:solidFill>
+            <a:schemeClr val="phClr"/>
+          </a:solidFill>
+          <a:prstDash val="solid"/>
+          <a:miter lim="800000"/>
+        </a:ln>
+      </a:lnStyleLst>
+      <a:effectStyleLst>
+        <a:effectStyle>
+          <a:effectLst/>
+        </a:effectStyle>
+        <a:effectStyle>
+          <a:effectLst/>
+        </a:effectStyle>
+        <a:effectStyle>
+          <a:effectLst>
+            <a:outerShdw blurRad="57150" dist="19050" dir="5400000" algn="ctr" rotWithShape="0">
+              <a:srgbClr val="000000">
+                <a:alpha val="63000"/>
+              </a:srgbClr>
+            </a:outerShdw>
+          </a:effectLst>
+        </a:effectStyle>
+      </a:effectStyleLst>
+      <a:bgFillStyleLst>
+        <a:solidFill>
+          <a:schemeClr val="phClr"/>
+        </a:solidFill>
+        <a:solidFill>
+          <a:schemeClr val="phClr">
+            <a:tint val="95000"/>
+            <a:satMod val="170000"/>
+          </a:schemeClr>
+        </a:solidFill>
+        <a:gradFill rotWithShape="1">
+          <a:gsLst>
+            <a:gs pos="0">
+              <a:schemeClr val="phClr">
+                <a:tint val="93000"/>
+                <a:satMod val="150000"/>
+                <a:shade val="98000"/>
+                <a:lumMod val="102000"/>
+              </a:schemeClr>
+            </a:gs>
+            <a:gs pos="50000">
+              <a:schemeClr val="phClr">
+                <a:tint val="98000"/>
+                <a:satMod val="130000"/>
+                <a:shade val="90000"/>
+                <a:lumMod val="103000"/>
+              </a:schemeClr>
+            </a:gs>
+            <a:gs pos="100000">
+              <a:schemeClr val="phClr">
+                <a:shade val="63000"/>
+                <a:satMod val="120000"/>
+              </a:schemeClr>
+            </a:gs>
+          </a:gsLst>
+          <a:lin ang="5400000" scaled="0"/>
+        </a:gradFill>
+      </a:bgFillStyleLst>
+    </a:fmtScheme>
+  </a:themeElements>
+  <a:objectDefaults>
+    <a:lnDef>
+      <a:spPr/>
+      <a:bodyPr/>
+      <a:lstStyle/>
+      <a:style>
+        <a:lnRef idx="2">
+          <a:schemeClr val="accent1"/>
+        </a:lnRef>
+        <a:fillRef idx="0">
+          <a:schemeClr val="accent1"/>
+        </a:fillRef>
+        <a:effectRef idx="1">
+          <a:schemeClr val="accent1"/>
+        </a:effectRef>
+        <a:fontRef idx="minor">
+          <a:schemeClr val="tx1"/>
+        </a:fontRef>
+      </a:style>
+    </a:lnDef>
+  </a:objectDefaults>
+  <a:extraClrSchemeLst/>
+  <a:extLst>
+    <a:ext uri="{05A4C25C-085E-4340-85A3-A5531E510DB2}">
+      <thm15:themeFamily xmlns:thm15="http://schemas.microsoft.com/office/thememl/2012/main" name="Office Theme" id="{2E142A2C-CD16-42D6-873A-C26D2A0506FA}" vid="{1BDDFF52-6CD6-40A5-AB3C-68EB2F1E4D0A}"/>
+    </a:ext>
+  </a:extLst>
+</a:theme>
 </file>